--- a/round1_baselines/Presentation1.pptx
+++ b/round1_baselines/Presentation1.pptx
@@ -15669,7 +15669,7 @@
         </p:nvSpPr>
         <p:spPr>
           <a:xfrm>
-            <a:off x="773382" y="2444187"/>
+            <a:off x="782825" y="2239565"/>
             <a:ext cx="3810000" cy="1295400"/>
           </a:xfrm>
           <a:prstGeom prst="rect">
@@ -15693,21 +15693,65 @@
           <a:bodyPr lIns="0" tIns="0" rIns="0" bIns="0" anchor="t"/>
           <a:lstStyle/>
           <a:p>
-            <a:pPr algn="l">
-              <a:defRPr sz="1275" b="0">
-                <a:solidFill>
-                  <a:srgbClr val="44546A"/>
-                </a:solidFill>
-              </a:defRPr>
-            </a:pPr>
-            <a:r>
-              <a:rPr sz="1275" b="0">
-                <a:solidFill>
-                  <a:srgbClr val="44546A"/>
-                </a:solidFill>
-              </a:rPr>
-              <a:t>candidate position, history length, unique history length, hour / weekday / weekend, category / subcategory, title / abstract lengths, history-category ratios, and train-time news popularity statistics</a:t>
-            </a:r>
+            <a:r>
+              <a:rPr lang="en-US" sz="1200" b="1" dirty="0"/>
+              <a:t>User behavior features:</a:t>
+            </a:r>
+            <a:r>
+              <a:rPr lang="en-US" sz="1200" dirty="0"/>
+              <a:t> history length, unique history length, history category/subcategory count and ratios</a:t>
+            </a:r>
+          </a:p>
+          <a:p>
+            <a:r>
+              <a:rPr lang="en-US" sz="1200" b="1" dirty="0"/>
+              <a:t>Content features:</a:t>
+            </a:r>
+            <a:r>
+              <a:rPr lang="en-US" sz="1200" dirty="0"/>
+              <a:t> category, subcategory, title length, abstract length</a:t>
+            </a:r>
+          </a:p>
+          <a:p>
+            <a:r>
+              <a:rPr lang="en-US" sz="1200" b="1" dirty="0"/>
+              <a:t>Context features:</a:t>
+            </a:r>
+            <a:r>
+              <a:rPr lang="en-US" sz="1200" dirty="0"/>
+              <a:t> hour, weekday, weekend</a:t>
+            </a:r>
+          </a:p>
+          <a:p>
+            <a:r>
+              <a:rPr lang="en-US" sz="1200" b="1" dirty="0"/>
+              <a:t>Popularity features:</a:t>
+            </a:r>
+            <a:r>
+              <a:rPr lang="en-US" sz="1200" dirty="0"/>
+              <a:t> </a:t>
+            </a:r>
+            <a:r>
+              <a:rPr lang="en-US" sz="1200" dirty="0" err="1"/>
+              <a:t>news_train_clicks</a:t>
+            </a:r>
+            <a:r>
+              <a:rPr lang="en-US" sz="1200" dirty="0"/>
+              <a:t>, </a:t>
+            </a:r>
+            <a:r>
+              <a:rPr lang="en-US" sz="1200" dirty="0" err="1"/>
+              <a:t>news_train_ctr</a:t>
+            </a:r>
+            <a:r>
+              <a:rPr lang="en-US" sz="1200" dirty="0"/>
+              <a:t>, </a:t>
+            </a:r>
+            <a:r>
+              <a:rPr lang="en-US" sz="1200" dirty="0" err="1"/>
+              <a:t>news_train_impressions</a:t>
+            </a:r>
+            <a:endParaRPr lang="en-US" sz="1200" dirty="0"/>
           </a:p>
         </p:txBody>
       </p:sp>
@@ -15827,8 +15871,8 @@
         </p:nvSpPr>
         <p:spPr>
           <a:xfrm>
-            <a:off x="5339029" y="2946095"/>
-            <a:ext cx="3964053" cy="762000"/>
+            <a:off x="5339029" y="2946094"/>
+            <a:ext cx="3964053" cy="1918755"/>
           </a:xfrm>
           <a:prstGeom prst="rect">
             <a:avLst/>
@@ -15851,6 +15895,80 @@
           <a:bodyPr lIns="0" tIns="0" rIns="0" bIns="0" anchor="t"/>
           <a:lstStyle/>
           <a:p>
+            <a:r>
+              <a:rPr lang="en-US" sz="1000" dirty="0"/>
+              <a:t>Feature importance shows that </a:t>
+            </a:r>
+            <a:r>
+              <a:rPr lang="en-US" sz="1000" b="1" dirty="0" err="1"/>
+              <a:t>news_train_clicks</a:t>
+            </a:r>
+            <a:r>
+              <a:rPr lang="en-US" sz="1000" b="1" dirty="0"/>
+              <a:t> and </a:t>
+            </a:r>
+            <a:r>
+              <a:rPr lang="en-US" sz="1000" b="1" dirty="0" err="1"/>
+              <a:t>news_train_ctr</a:t>
+            </a:r>
+            <a:r>
+              <a:rPr lang="en-US" sz="1000" b="1" dirty="0"/>
+              <a:t> dominate the model</a:t>
+            </a:r>
+            <a:r>
+              <a:rPr lang="en-US" sz="1000" dirty="0"/>
+              <a:t>, indicating that the model relies heavily on </a:t>
+            </a:r>
+            <a:r>
+              <a:rPr lang="en-US" sz="1000" b="1" dirty="0"/>
+              <a:t>global popularity signals learned from training data</a:t>
+            </a:r>
+            <a:r>
+              <a:rPr lang="en-US" sz="1000" dirty="0"/>
+              <a:t>.</a:t>
+            </a:r>
+          </a:p>
+          <a:p>
+            <a:r>
+              <a:rPr lang="en-US" sz="1000" dirty="0"/>
+              <a:t>User-interest features (e.g., </a:t>
+            </a:r>
+            <a:r>
+              <a:rPr lang="en-US" sz="1000" dirty="0" err="1"/>
+              <a:t>history_subcategory_count</a:t>
+            </a:r>
+            <a:r>
+              <a:rPr lang="en-US" sz="1000" dirty="0"/>
+              <a:t>, history ratios) contribute moderately, suggesting some level of personalization, but their impact is significantly smaller.</a:t>
+            </a:r>
+          </a:p>
+          <a:p>
+            <a:r>
+              <a:rPr lang="en-US" sz="1000" dirty="0"/>
+              <a:t>Contextual features (hour, weekday) and content-based features (title length, category) have relatively minor contributions.</a:t>
+            </a:r>
+          </a:p>
+          <a:p>
+            <a:br>
+              <a:rPr lang="en-US" sz="1000" dirty="0"/>
+            </a:br>
+            <a:endParaRPr lang="en-US" sz="1000" dirty="0"/>
+          </a:p>
+          <a:p>
+            <a:r>
+              <a:rPr lang="en-US" sz="1000" dirty="0"/>
+              <a:t>Overall, the model is primarily driven by </a:t>
+            </a:r>
+            <a:r>
+              <a:rPr lang="en-US" sz="1000" b="1" dirty="0"/>
+              <a:t>popularity signals</a:t>
+            </a:r>
+            <a:r>
+              <a:rPr lang="en-US" sz="1000" dirty="0"/>
+              <a:t>, with limited reliance on deep user preference modeling.</a:t>
+            </a:r>
+          </a:p>
+          <a:p>
             <a:pPr>
               <a:defRPr sz="1275" b="0">
                 <a:solidFill>
@@ -15858,31 +15976,7 @@
                 </a:solidFill>
               </a:defRPr>
             </a:pPr>
-            <a:r>
-              <a:rPr lang="en-US" sz="1050" i="1" dirty="0" err="1"/>
-              <a:t>news_train_ctr</a:t>
-            </a:r>
-            <a:r>
-              <a:rPr lang="en-US" sz="1050" i="1" dirty="0"/>
-              <a:t> captures item-level global popularity learned from training clicks, while </a:t>
-            </a:r>
-            <a:r>
-              <a:rPr lang="en-US" sz="1050" i="1" dirty="0" err="1"/>
-              <a:t>candidate_pos</a:t>
-            </a:r>
-            <a:r>
-              <a:rPr lang="en-US" sz="1050" i="1" dirty="0"/>
-              <a:t> captures exposure/order effects in the candidate list. In contrast, user-interest matching features (</a:t>
-            </a:r>
-            <a:r>
-              <a:rPr lang="en-US" sz="1050" i="1" dirty="0" err="1"/>
-              <a:t>history_category</a:t>
-            </a:r>
-            <a:r>
-              <a:rPr lang="en-US" sz="1050" i="1" dirty="0"/>
-              <a:t>/subcategory count/ratio and category fields) encode personalization and contribute less gain. This indicates the model is currently driven more by popularity and position priors than by deep user-specific preference modeling.</a:t>
-            </a:r>
-            <a:endParaRPr sz="1050" b="0" dirty="0">
+            <a:endParaRPr sz="1000" b="0" dirty="0">
               <a:solidFill>
                 <a:srgbClr val="44546A"/>
               </a:solidFill>
@@ -16331,13 +16425,26 @@
               </a:defRPr>
             </a:pPr>
             <a:r>
-              <a:rPr sz="2100" b="1">
+              <a:rPr sz="2100" b="1" dirty="0">
                 <a:solidFill>
                   <a:srgbClr val="000000"/>
                 </a:solidFill>
               </a:rPr>
-              <a:t>0.6110</a:t>
-            </a:r>
+              <a:t>0.6</a:t>
+            </a:r>
+            <a:r>
+              <a:rPr lang="en-US" altLang="zh-CN" sz="2100" b="1" dirty="0">
+                <a:solidFill>
+                  <a:srgbClr val="000000"/>
+                </a:solidFill>
+              </a:rPr>
+              <a:t>408</a:t>
+            </a:r>
+            <a:endParaRPr sz="2100" b="1" dirty="0">
+              <a:solidFill>
+                <a:srgbClr val="000000"/>
+              </a:solidFill>
+            </a:endParaRPr>
           </a:p>
         </p:txBody>
       </p:sp>
@@ -16529,13 +16636,26 @@
               </a:defRPr>
             </a:pPr>
             <a:r>
-              <a:rPr sz="2100" b="1">
+              <a:rPr sz="2100" b="1" dirty="0">
                 <a:solidFill>
                   <a:srgbClr val="000000"/>
                 </a:solidFill>
               </a:rPr>
-              <a:t>0.3332</a:t>
-            </a:r>
+              <a:t>0.3</a:t>
+            </a:r>
+            <a:r>
+              <a:rPr lang="en-US" altLang="zh-CN" sz="2100" b="1" dirty="0">
+                <a:solidFill>
+                  <a:srgbClr val="000000"/>
+                </a:solidFill>
+              </a:rPr>
+              <a:t>539</a:t>
+            </a:r>
+            <a:endParaRPr sz="2100" b="1" dirty="0">
+              <a:solidFill>
+                <a:srgbClr val="000000"/>
+              </a:solidFill>
+            </a:endParaRPr>
           </a:p>
         </p:txBody>
       </p:sp>
@@ -16727,13 +16847,26 @@
               </a:defRPr>
             </a:pPr>
             <a:r>
-              <a:rPr sz="2100" b="1">
+              <a:rPr sz="2100" b="1" dirty="0">
                 <a:solidFill>
                   <a:srgbClr val="000000"/>
                 </a:solidFill>
               </a:rPr>
-              <a:t>0.3141</a:t>
-            </a:r>
+              <a:t>0.3</a:t>
+            </a:r>
+            <a:r>
+              <a:rPr lang="en-US" altLang="zh-CN" sz="2100" b="1" dirty="0">
+                <a:solidFill>
+                  <a:srgbClr val="000000"/>
+                </a:solidFill>
+              </a:rPr>
+              <a:t>366</a:t>
+            </a:r>
+            <a:endParaRPr sz="2100" b="1" dirty="0">
+              <a:solidFill>
+                <a:srgbClr val="000000"/>
+              </a:solidFill>
+            </a:endParaRPr>
           </a:p>
         </p:txBody>
       </p:sp>
@@ -16930,8 +17063,21 @@
                   <a:srgbClr val="000000"/>
                 </a:solidFill>
               </a:rPr>
-              <a:t>0.3716</a:t>
-            </a:r>
+              <a:t>0.3</a:t>
+            </a:r>
+            <a:r>
+              <a:rPr lang="en-US" altLang="zh-CN" sz="2100" b="1" dirty="0">
+                <a:solidFill>
+                  <a:srgbClr val="000000"/>
+                </a:solidFill>
+              </a:rPr>
+              <a:t>962</a:t>
+            </a:r>
+            <a:endParaRPr sz="2100" b="1" dirty="0">
+              <a:solidFill>
+                <a:srgbClr val="000000"/>
+              </a:solidFill>
+            </a:endParaRPr>
           </a:p>
         </p:txBody>
       </p:sp>
@@ -17122,8 +17268,8 @@
         </p:nvSpPr>
         <p:spPr>
           <a:xfrm>
-            <a:off x="5404037" y="4687077"/>
-            <a:ext cx="5753100" cy="1479336"/>
+            <a:off x="5404037" y="4687076"/>
+            <a:ext cx="5753100" cy="1992769"/>
           </a:xfrm>
           <a:prstGeom prst="rect">
             <a:avLst/>
@@ -17167,7 +17313,39 @@
                   <a:srgbClr val="44546A"/>
                 </a:solidFill>
               </a:rPr>
-              <a:t> is effectively tied with Logistic Regression on AUC and wins the ranking-oriented metrics MRR, nDCG@5, and nDCG@10. That makes it the best overall Round 1 baseline for recommendation quality.</a:t>
+              <a:t> is effectively tied with Logistic Regression on AUC and wins</a:t>
+            </a:r>
+            <a:r>
+              <a:rPr lang="en-US" sz="1275" b="0" dirty="0">
+                <a:solidFill>
+                  <a:srgbClr val="44546A"/>
+                </a:solidFill>
+              </a:rPr>
+              <a:t> all</a:t>
+            </a:r>
+            <a:r>
+              <a:rPr sz="1275" b="0" dirty="0">
+                <a:solidFill>
+                  <a:srgbClr val="44546A"/>
+                </a:solidFill>
+              </a:rPr>
+              <a:t> the ranking-oriented metrics</a:t>
+            </a:r>
+            <a:r>
+              <a:rPr lang="en-US" sz="1275" b="0" dirty="0">
+                <a:solidFill>
+                  <a:srgbClr val="44546A"/>
+                </a:solidFill>
+              </a:rPr>
+              <a:t>. </a:t>
+            </a:r>
+            <a:r>
+              <a:rPr sz="1275" b="0" dirty="0">
+                <a:solidFill>
+                  <a:srgbClr val="44546A"/>
+                </a:solidFill>
+              </a:rPr>
+              <a:t>That makes it the best overall Round 1 baseline for recommendation quality.</a:t>
             </a:r>
             <a:endParaRPr lang="en-US" sz="1275" b="0" dirty="0">
               <a:solidFill>
@@ -17230,43 +17408,42 @@
                 </a:solidFill>
               </a:defRPr>
             </a:pPr>
-            <a:endParaRPr lang="en-US" sz="1275" dirty="0">
-              <a:solidFill>
-                <a:srgbClr val="44546A"/>
-              </a:solidFill>
-            </a:endParaRPr>
-          </a:p>
-          <a:p>
-            <a:pPr>
-              <a:defRPr sz="1275" b="0">
-                <a:solidFill>
-                  <a:srgbClr val="44546A"/>
-                </a:solidFill>
-              </a:defRPr>
-            </a:pPr>
-            <a:r>
+            <a:br>
               <a:rPr lang="en-US" sz="1275" dirty="0">
                 <a:solidFill>
                   <a:srgbClr val="44546A"/>
                 </a:solidFill>
               </a:rPr>
-              <a:t>Position-bias amplification risk: Strong dependence on </a:t>
-            </a:r>
-            <a:r>
-              <a:rPr lang="en-US" sz="1275" dirty="0" err="1">
-                <a:solidFill>
-                  <a:srgbClr val="44546A"/>
-                </a:solidFill>
-              </a:rPr>
-              <a:t>candidate_pos</a:t>
-            </a:r>
+            </a:br>
             <a:r>
               <a:rPr lang="en-US" sz="1275" dirty="0">
                 <a:solidFill>
                   <a:srgbClr val="44546A"/>
                 </a:solidFill>
               </a:rPr>
-              <a:t> suggests the model may learn exposure order effects rather than pure relevance, which can hurt robustness if ranking policies change.</a:t>
+              <a:t>Future improvements should focus on:</a:t>
+            </a:r>
+          </a:p>
+          <a:p>
+            <a:pPr lvl="1"/>
+            <a:r>
+              <a:rPr lang="en-US" sz="1275" dirty="0">
+                <a:solidFill>
+                  <a:srgbClr val="44546A"/>
+                </a:solidFill>
+              </a:rPr>
+              <a:t>strengthening user-interest modeling</a:t>
+            </a:r>
+          </a:p>
+          <a:p>
+            <a:pPr lvl="1"/>
+            <a:r>
+              <a:rPr lang="en-US" sz="1275" dirty="0">
+                <a:solidFill>
+                  <a:srgbClr val="44546A"/>
+                </a:solidFill>
+              </a:rPr>
+              <a:t>incorporating semantic representations (e.g., embeddings)</a:t>
             </a:r>
           </a:p>
           <a:p>
@@ -17355,10 +17532,10 @@
       </p:pic>
       <p:pic>
         <p:nvPicPr>
-          <p:cNvPr id="2" name="Picture 1">
-            <a:extLst>
-              <a:ext uri="{FF2B5EF4-FFF2-40B4-BE49-F238E27FC236}">
-                <a16:creationId xmlns:a16="http://schemas.microsoft.com/office/drawing/2014/main" id="{4FB67BE3-91D3-50AB-CF8D-169A5D7F9967}"/>
+          <p:cNvPr id="3" name="Picture 2">
+            <a:extLst>
+              <a:ext uri="{FF2B5EF4-FFF2-40B4-BE49-F238E27FC236}">
+                <a16:creationId xmlns:a16="http://schemas.microsoft.com/office/drawing/2014/main" id="{2A0183D8-B700-A7C1-2F58-B89095132629}"/>
               </a:ext>
             </a:extLst>
           </p:cNvPr>
@@ -17375,8 +17552,8 @@
         </p:blipFill>
         <p:spPr>
           <a:xfrm>
-            <a:off x="781050" y="4142185"/>
-            <a:ext cx="3714750" cy="2304085"/>
+            <a:off x="457200" y="4000499"/>
+            <a:ext cx="4319764" cy="2679347"/>
           </a:xfrm>
           <a:prstGeom prst="rect">
             <a:avLst/>
@@ -19738,21 +19915,61 @@
       </p:sp>
       <p:sp>
         <p:nvSpPr>
-          <p:cNvPr id="50" name="Rectangle 49">
-            <a:extLst>
-              <a:ext uri="{FF2B5EF4-FFF2-40B4-BE49-F238E27FC236}">
-                <a16:creationId xmlns:a16="http://schemas.microsoft.com/office/drawing/2014/main" id="{5116459B-3F6A-4941-BBAC-7CCB22A1B73C}"/>
-              </a:ext>
-            </a:extLst>
-          </p:cNvPr>
-          <p:cNvSpPr>
-            <a:spLocks noGrp="1"/>
-          </p:cNvSpPr>
-          <p:nvPr/>
-        </p:nvSpPr>
-        <p:spPr>
-          <a:xfrm>
-            <a:off x="2419350" y="3867150"/>
+          <p:cNvPr id="51" name="Rectangle 50">
+            <a:extLst>
+              <a:ext uri="{FF2B5EF4-FFF2-40B4-BE49-F238E27FC236}">
+                <a16:creationId xmlns:a16="http://schemas.microsoft.com/office/drawing/2014/main" id="{60048889-66E1-46D6-8631-AF9F075DB4BC}"/>
+              </a:ext>
+            </a:extLst>
+          </p:cNvPr>
+          <p:cNvSpPr>
+            <a:spLocks noGrp="1"/>
+          </p:cNvSpPr>
+          <p:nvPr/>
+        </p:nvSpPr>
+        <p:spPr>
+          <a:xfrm>
+            <a:off x="3848100" y="3790950"/>
+            <a:ext cx="1524000" cy="514350"/>
+          </a:xfrm>
+          <a:prstGeom prst="rect">
+            <a:avLst/>
+          </a:prstGeom>
+          <a:solidFill>
+            <a:srgbClr val="FFF7DF"/>
+          </a:solidFill>
+          <a:ln w="9525">
+            <a:solidFill>
+              <a:srgbClr val="D9D9D9"/>
+            </a:solidFill>
+            <a:prstDash val="solid"/>
+          </a:ln>
+        </p:spPr>
+        <p:txBody>
+          <a:bodyPr/>
+          <a:lstStyle/>
+          <a:p>
+            <a:endParaRPr lang="en-US"/>
+          </a:p>
+        </p:txBody>
+      </p:sp>
+      <p:sp>
+        <p:nvSpPr>
+          <p:cNvPr id="52" name="Rectangle 51">
+            <a:extLst>
+              <a:ext uri="{FF2B5EF4-FFF2-40B4-BE49-F238E27FC236}">
+                <a16:creationId xmlns:a16="http://schemas.microsoft.com/office/drawing/2014/main" id="{00BD6CB3-BE2A-43B1-8295-71D7CFD15A86}"/>
+              </a:ext>
+            </a:extLst>
+          </p:cNvPr>
+          <p:cNvSpPr>
+            <a:spLocks noGrp="1"/>
+          </p:cNvSpPr>
+          <p:nvPr/>
+        </p:nvSpPr>
+        <p:spPr>
+          <a:xfrm>
+            <a:off x="3943350" y="3867150"/>
             <a:ext cx="1333500" cy="361950"/>
           </a:xfrm>
           <a:prstGeom prst="rect">
@@ -19777,40 +19994,40 @@
           <a:lstStyle/>
           <a:p>
             <a:pPr algn="ctr">
-              <a:defRPr sz="1125" b="1">
-                <a:solidFill>
-                  <a:srgbClr val="44546A"/>
-                </a:solidFill>
-              </a:defRPr>
-            </a:pPr>
-            <a:r>
-              <a:rPr sz="1125" b="1">
-                <a:solidFill>
-                  <a:srgbClr val="44546A"/>
-                </a:solidFill>
-              </a:rPr>
-              <a:t>0.6112</a:t>
-            </a:r>
-          </a:p>
-        </p:txBody>
-      </p:sp>
-      <p:sp>
-        <p:nvSpPr>
-          <p:cNvPr id="51" name="Rectangle 50">
-            <a:extLst>
-              <a:ext uri="{FF2B5EF4-FFF2-40B4-BE49-F238E27FC236}">
-                <a16:creationId xmlns:a16="http://schemas.microsoft.com/office/drawing/2014/main" id="{60048889-66E1-46D6-8631-AF9F075DB4BC}"/>
-              </a:ext>
-            </a:extLst>
-          </p:cNvPr>
-          <p:cNvSpPr>
-            <a:spLocks noGrp="1"/>
-          </p:cNvSpPr>
-          <p:nvPr/>
-        </p:nvSpPr>
-        <p:spPr>
-          <a:xfrm>
-            <a:off x="3848100" y="3790950"/>
+              <a:defRPr sz="1125" b="0">
+                <a:solidFill>
+                  <a:srgbClr val="44546A"/>
+                </a:solidFill>
+              </a:defRPr>
+            </a:pPr>
+            <a:r>
+              <a:rPr sz="1125" b="0" dirty="0">
+                <a:solidFill>
+                  <a:srgbClr val="44546A"/>
+                </a:solidFill>
+              </a:rPr>
+              <a:t>0.3130</a:t>
+            </a:r>
+          </a:p>
+        </p:txBody>
+      </p:sp>
+      <p:sp>
+        <p:nvSpPr>
+          <p:cNvPr id="53" name="Rectangle 52">
+            <a:extLst>
+              <a:ext uri="{FF2B5EF4-FFF2-40B4-BE49-F238E27FC236}">
+                <a16:creationId xmlns:a16="http://schemas.microsoft.com/office/drawing/2014/main" id="{8110230C-A40E-4ED8-B7F1-9113734D3DC0}"/>
+              </a:ext>
+            </a:extLst>
+          </p:cNvPr>
+          <p:cNvSpPr>
+            <a:spLocks noGrp="1"/>
+          </p:cNvSpPr>
+          <p:nvPr/>
+        </p:nvSpPr>
+        <p:spPr>
+          <a:xfrm>
+            <a:off x="5372100" y="3790950"/>
             <a:ext cx="1524000" cy="514350"/>
           </a:xfrm>
           <a:prstGeom prst="rect">
@@ -19836,21 +20053,21 @@
       </p:sp>
       <p:sp>
         <p:nvSpPr>
-          <p:cNvPr id="52" name="Rectangle 51">
-            <a:extLst>
-              <a:ext uri="{FF2B5EF4-FFF2-40B4-BE49-F238E27FC236}">
-                <a16:creationId xmlns:a16="http://schemas.microsoft.com/office/drawing/2014/main" id="{00BD6CB3-BE2A-43B1-8295-71D7CFD15A86}"/>
-              </a:ext>
-            </a:extLst>
-          </p:cNvPr>
-          <p:cNvSpPr>
-            <a:spLocks noGrp="1"/>
-          </p:cNvSpPr>
-          <p:nvPr/>
-        </p:nvSpPr>
-        <p:spPr>
-          <a:xfrm>
-            <a:off x="3943350" y="3867150"/>
+          <p:cNvPr id="54" name="Rectangle 53">
+            <a:extLst>
+              <a:ext uri="{FF2B5EF4-FFF2-40B4-BE49-F238E27FC236}">
+                <a16:creationId xmlns:a16="http://schemas.microsoft.com/office/drawing/2014/main" id="{A686A552-20B1-4B7C-9733-C98682392D13}"/>
+              </a:ext>
+            </a:extLst>
+          </p:cNvPr>
+          <p:cNvSpPr>
+            <a:spLocks noGrp="1"/>
+          </p:cNvSpPr>
+          <p:nvPr/>
+        </p:nvSpPr>
+        <p:spPr>
+          <a:xfrm>
+            <a:off x="5467350" y="3867150"/>
             <a:ext cx="1333500" cy="361950"/>
           </a:xfrm>
           <a:prstGeom prst="rect">
@@ -19887,28 +20104,28 @@
                   <a:srgbClr val="44546A"/>
                 </a:solidFill>
               </a:rPr>
-              <a:t>0.3130</a:t>
-            </a:r>
-          </a:p>
-        </p:txBody>
-      </p:sp>
-      <p:sp>
-        <p:nvSpPr>
-          <p:cNvPr id="53" name="Rectangle 52">
-            <a:extLst>
-              <a:ext uri="{FF2B5EF4-FFF2-40B4-BE49-F238E27FC236}">
-                <a16:creationId xmlns:a16="http://schemas.microsoft.com/office/drawing/2014/main" id="{8110230C-A40E-4ED8-B7F1-9113734D3DC0}"/>
-              </a:ext>
-            </a:extLst>
-          </p:cNvPr>
-          <p:cNvSpPr>
-            <a:spLocks noGrp="1"/>
-          </p:cNvSpPr>
-          <p:nvPr/>
-        </p:nvSpPr>
-        <p:spPr>
-          <a:xfrm>
-            <a:off x="5372100" y="3790950"/>
+              <a:t>0.3005</a:t>
+            </a:r>
+          </a:p>
+        </p:txBody>
+      </p:sp>
+      <p:sp>
+        <p:nvSpPr>
+          <p:cNvPr id="55" name="Rectangle 54">
+            <a:extLst>
+              <a:ext uri="{FF2B5EF4-FFF2-40B4-BE49-F238E27FC236}">
+                <a16:creationId xmlns:a16="http://schemas.microsoft.com/office/drawing/2014/main" id="{E14BADE0-F862-41E6-8B2C-1D3351CCEFFA}"/>
+              </a:ext>
+            </a:extLst>
+          </p:cNvPr>
+          <p:cNvSpPr>
+            <a:spLocks noGrp="1"/>
+          </p:cNvSpPr>
+          <p:nvPr/>
+        </p:nvSpPr>
+        <p:spPr>
+          <a:xfrm>
+            <a:off x="6896100" y="3790950"/>
             <a:ext cx="1524000" cy="514350"/>
           </a:xfrm>
           <a:prstGeom prst="rect">
@@ -19934,21 +20151,21 @@
       </p:sp>
       <p:sp>
         <p:nvSpPr>
-          <p:cNvPr id="54" name="Rectangle 53">
-            <a:extLst>
-              <a:ext uri="{FF2B5EF4-FFF2-40B4-BE49-F238E27FC236}">
-                <a16:creationId xmlns:a16="http://schemas.microsoft.com/office/drawing/2014/main" id="{A686A552-20B1-4B7C-9733-C98682392D13}"/>
-              </a:ext>
-            </a:extLst>
-          </p:cNvPr>
-          <p:cNvSpPr>
-            <a:spLocks noGrp="1"/>
-          </p:cNvSpPr>
-          <p:nvPr/>
-        </p:nvSpPr>
-        <p:spPr>
-          <a:xfrm>
-            <a:off x="5467350" y="3867150"/>
+          <p:cNvPr id="56" name="Rectangle 55">
+            <a:extLst>
+              <a:ext uri="{FF2B5EF4-FFF2-40B4-BE49-F238E27FC236}">
+                <a16:creationId xmlns:a16="http://schemas.microsoft.com/office/drawing/2014/main" id="{223A0C43-2A73-4AB5-B20C-A2BE9FA59CFE}"/>
+              </a:ext>
+            </a:extLst>
+          </p:cNvPr>
+          <p:cNvSpPr>
+            <a:spLocks noGrp="1"/>
+          </p:cNvSpPr>
+          <p:nvPr/>
+        </p:nvSpPr>
+        <p:spPr>
+          <a:xfrm>
+            <a:off x="6991350" y="3867150"/>
             <a:ext cx="1333500" cy="361950"/>
           </a:xfrm>
           <a:prstGeom prst="rect">
@@ -19985,35 +20202,35 @@
                   <a:srgbClr val="44546A"/>
                 </a:solidFill>
               </a:rPr>
-              <a:t>0.3005</a:t>
-            </a:r>
-          </a:p>
-        </p:txBody>
-      </p:sp>
-      <p:sp>
-        <p:nvSpPr>
-          <p:cNvPr id="55" name="Rectangle 54">
-            <a:extLst>
-              <a:ext uri="{FF2B5EF4-FFF2-40B4-BE49-F238E27FC236}">
-                <a16:creationId xmlns:a16="http://schemas.microsoft.com/office/drawing/2014/main" id="{E14BADE0-F862-41E6-8B2C-1D3351CCEFFA}"/>
-              </a:ext>
-            </a:extLst>
-          </p:cNvPr>
-          <p:cNvSpPr>
-            <a:spLocks noGrp="1"/>
-          </p:cNvSpPr>
-          <p:nvPr/>
-        </p:nvSpPr>
-        <p:spPr>
-          <a:xfrm>
-            <a:off x="6896100" y="3790950"/>
-            <a:ext cx="1524000" cy="514350"/>
-          </a:xfrm>
-          <a:prstGeom prst="rect">
-            <a:avLst/>
-          </a:prstGeom>
-          <a:solidFill>
-            <a:srgbClr val="FFF7DF"/>
+              <a:t>0.3640</a:t>
+            </a:r>
+          </a:p>
+        </p:txBody>
+      </p:sp>
+      <p:sp>
+        <p:nvSpPr>
+          <p:cNvPr id="57" name="Rectangle 56">
+            <a:extLst>
+              <a:ext uri="{FF2B5EF4-FFF2-40B4-BE49-F238E27FC236}">
+                <a16:creationId xmlns:a16="http://schemas.microsoft.com/office/drawing/2014/main" id="{DD7EDCF2-090B-4FC5-AE61-05E630D39D75}"/>
+              </a:ext>
+            </a:extLst>
+          </p:cNvPr>
+          <p:cNvSpPr>
+            <a:spLocks noGrp="1"/>
+          </p:cNvSpPr>
+          <p:nvPr/>
+        </p:nvSpPr>
+        <p:spPr>
+          <a:xfrm>
+            <a:off x="609600" y="4305300"/>
+            <a:ext cx="1714500" cy="514350"/>
+          </a:xfrm>
+          <a:prstGeom prst="rect">
+            <a:avLst/>
+          </a:prstGeom>
+          <a:solidFill>
+            <a:srgbClr val="EEF5FC"/>
           </a:solidFill>
           <a:ln w="9525">
             <a:solidFill>
@@ -20032,22 +20249,22 @@
       </p:sp>
       <p:sp>
         <p:nvSpPr>
-          <p:cNvPr id="56" name="Rectangle 55">
-            <a:extLst>
-              <a:ext uri="{FF2B5EF4-FFF2-40B4-BE49-F238E27FC236}">
-                <a16:creationId xmlns:a16="http://schemas.microsoft.com/office/drawing/2014/main" id="{223A0C43-2A73-4AB5-B20C-A2BE9FA59CFE}"/>
-              </a:ext>
-            </a:extLst>
-          </p:cNvPr>
-          <p:cNvSpPr>
-            <a:spLocks noGrp="1"/>
-          </p:cNvSpPr>
-          <p:nvPr/>
-        </p:nvSpPr>
-        <p:spPr>
-          <a:xfrm>
-            <a:off x="6991350" y="3867150"/>
-            <a:ext cx="1333500" cy="361950"/>
+          <p:cNvPr id="58" name="Rectangle 57">
+            <a:extLst>
+              <a:ext uri="{FF2B5EF4-FFF2-40B4-BE49-F238E27FC236}">
+                <a16:creationId xmlns:a16="http://schemas.microsoft.com/office/drawing/2014/main" id="{43CDC45C-4945-4816-AD3E-8C6AD5A80E82}"/>
+              </a:ext>
+            </a:extLst>
+          </p:cNvPr>
+          <p:cNvSpPr>
+            <a:spLocks noGrp="1"/>
+          </p:cNvSpPr>
+          <p:nvPr/>
+        </p:nvSpPr>
+        <p:spPr>
+          <a:xfrm>
+            <a:off x="704850" y="4381500"/>
+            <a:ext cx="1524000" cy="361950"/>
           </a:xfrm>
           <a:prstGeom prst="rect">
             <a:avLst/>
@@ -20070,42 +20287,42 @@
           <a:bodyPr lIns="0" tIns="0" rIns="0" bIns="0" anchor="ctr"/>
           <a:lstStyle/>
           <a:p>
-            <a:pPr algn="ctr">
-              <a:defRPr sz="1125" b="0">
-                <a:solidFill>
-                  <a:srgbClr val="44546A"/>
-                </a:solidFill>
-              </a:defRPr>
-            </a:pPr>
-            <a:r>
-              <a:rPr sz="1125" b="0">
-                <a:solidFill>
-                  <a:srgbClr val="44546A"/>
-                </a:solidFill>
-              </a:rPr>
-              <a:t>0.3640</a:t>
-            </a:r>
-          </a:p>
-        </p:txBody>
-      </p:sp>
-      <p:sp>
-        <p:nvSpPr>
-          <p:cNvPr id="57" name="Rectangle 56">
-            <a:extLst>
-              <a:ext uri="{FF2B5EF4-FFF2-40B4-BE49-F238E27FC236}">
-                <a16:creationId xmlns:a16="http://schemas.microsoft.com/office/drawing/2014/main" id="{DD7EDCF2-090B-4FC5-AE61-05E630D39D75}"/>
-              </a:ext>
-            </a:extLst>
-          </p:cNvPr>
-          <p:cNvSpPr>
-            <a:spLocks noGrp="1"/>
-          </p:cNvSpPr>
-          <p:nvPr/>
-        </p:nvSpPr>
-        <p:spPr>
-          <a:xfrm>
-            <a:off x="609600" y="4305300"/>
-            <a:ext cx="1714500" cy="514350"/>
+            <a:pPr algn="l">
+              <a:defRPr sz="1125" b="1">
+                <a:solidFill>
+                  <a:srgbClr val="44546A"/>
+                </a:solidFill>
+              </a:defRPr>
+            </a:pPr>
+            <a:r>
+              <a:rPr sz="1125" b="1">
+                <a:solidFill>
+                  <a:srgbClr val="44546A"/>
+                </a:solidFill>
+              </a:rPr>
+              <a:t>LightGBM</a:t>
+            </a:r>
+          </a:p>
+        </p:txBody>
+      </p:sp>
+      <p:sp>
+        <p:nvSpPr>
+          <p:cNvPr id="59" name="Rectangle 58">
+            <a:extLst>
+              <a:ext uri="{FF2B5EF4-FFF2-40B4-BE49-F238E27FC236}">
+                <a16:creationId xmlns:a16="http://schemas.microsoft.com/office/drawing/2014/main" id="{2E9BEEBF-E499-443D-A6ED-0FBD1A3B37B8}"/>
+              </a:ext>
+            </a:extLst>
+          </p:cNvPr>
+          <p:cNvSpPr>
+            <a:spLocks noGrp="1"/>
+          </p:cNvSpPr>
+          <p:nvPr/>
+        </p:nvSpPr>
+        <p:spPr>
+          <a:xfrm>
+            <a:off x="2324100" y="4305300"/>
+            <a:ext cx="1524000" cy="514350"/>
           </a:xfrm>
           <a:prstGeom prst="rect">
             <a:avLst/>
@@ -20130,22 +20347,22 @@
       </p:sp>
       <p:sp>
         <p:nvSpPr>
-          <p:cNvPr id="58" name="Rectangle 57">
-            <a:extLst>
-              <a:ext uri="{FF2B5EF4-FFF2-40B4-BE49-F238E27FC236}">
-                <a16:creationId xmlns:a16="http://schemas.microsoft.com/office/drawing/2014/main" id="{43CDC45C-4945-4816-AD3E-8C6AD5A80E82}"/>
-              </a:ext>
-            </a:extLst>
-          </p:cNvPr>
-          <p:cNvSpPr>
-            <a:spLocks noGrp="1"/>
-          </p:cNvSpPr>
-          <p:nvPr/>
-        </p:nvSpPr>
-        <p:spPr>
-          <a:xfrm>
-            <a:off x="704850" y="4381500"/>
-            <a:ext cx="1524000" cy="361950"/>
+          <p:cNvPr id="60" name="Rectangle 59">
+            <a:extLst>
+              <a:ext uri="{FF2B5EF4-FFF2-40B4-BE49-F238E27FC236}">
+                <a16:creationId xmlns:a16="http://schemas.microsoft.com/office/drawing/2014/main" id="{77D9BA52-7C1F-4E96-8BF7-CE4564B901DF}"/>
+              </a:ext>
+            </a:extLst>
+          </p:cNvPr>
+          <p:cNvSpPr>
+            <a:spLocks noGrp="1"/>
+          </p:cNvSpPr>
+          <p:nvPr/>
+        </p:nvSpPr>
+        <p:spPr>
+          <a:xfrm>
+            <a:off x="2419350" y="4381500"/>
+            <a:ext cx="1333500" cy="361950"/>
           </a:xfrm>
           <a:prstGeom prst="rect">
             <a:avLst/>
@@ -20168,41 +20385,54 @@
           <a:bodyPr lIns="0" tIns="0" rIns="0" bIns="0" anchor="ctr"/>
           <a:lstStyle/>
           <a:p>
-            <a:pPr algn="l">
-              <a:defRPr sz="1125" b="1">
-                <a:solidFill>
-                  <a:srgbClr val="44546A"/>
-                </a:solidFill>
-              </a:defRPr>
-            </a:pPr>
-            <a:r>
-              <a:rPr sz="1125" b="1">
-                <a:solidFill>
-                  <a:srgbClr val="44546A"/>
-                </a:solidFill>
-              </a:rPr>
-              <a:t>LightGBM</a:t>
-            </a:r>
-          </a:p>
-        </p:txBody>
-      </p:sp>
-      <p:sp>
-        <p:nvSpPr>
-          <p:cNvPr id="59" name="Rectangle 58">
-            <a:extLst>
-              <a:ext uri="{FF2B5EF4-FFF2-40B4-BE49-F238E27FC236}">
-                <a16:creationId xmlns:a16="http://schemas.microsoft.com/office/drawing/2014/main" id="{2E9BEEBF-E499-443D-A6ED-0FBD1A3B37B8}"/>
-              </a:ext>
-            </a:extLst>
-          </p:cNvPr>
-          <p:cNvSpPr>
-            <a:spLocks noGrp="1"/>
-          </p:cNvSpPr>
-          <p:nvPr/>
-        </p:nvSpPr>
-        <p:spPr>
-          <a:xfrm>
-            <a:off x="2324100" y="4305300"/>
+            <a:pPr algn="ctr">
+              <a:defRPr sz="1125" b="0">
+                <a:solidFill>
+                  <a:srgbClr val="44546A"/>
+                </a:solidFill>
+              </a:defRPr>
+            </a:pPr>
+            <a:r>
+              <a:rPr sz="1125" b="1" dirty="0">
+                <a:solidFill>
+                  <a:srgbClr val="44546A"/>
+                </a:solidFill>
+              </a:rPr>
+              <a:t>0.6</a:t>
+            </a:r>
+            <a:r>
+              <a:rPr lang="en-US" sz="1125" b="1" dirty="0">
+                <a:solidFill>
+                  <a:srgbClr val="44546A"/>
+                </a:solidFill>
+              </a:rPr>
+              <a:t>408</a:t>
+            </a:r>
+            <a:endParaRPr sz="1125" b="1" dirty="0">
+              <a:solidFill>
+                <a:srgbClr val="44546A"/>
+              </a:solidFill>
+            </a:endParaRPr>
+          </a:p>
+        </p:txBody>
+      </p:sp>
+      <p:sp>
+        <p:nvSpPr>
+          <p:cNvPr id="61" name="Rectangle 60">
+            <a:extLst>
+              <a:ext uri="{FF2B5EF4-FFF2-40B4-BE49-F238E27FC236}">
+                <a16:creationId xmlns:a16="http://schemas.microsoft.com/office/drawing/2014/main" id="{18971F44-7A04-4B0F-9BA2-0D778126EA46}"/>
+              </a:ext>
+            </a:extLst>
+          </p:cNvPr>
+          <p:cNvSpPr>
+            <a:spLocks noGrp="1"/>
+          </p:cNvSpPr>
+          <p:nvPr/>
+        </p:nvSpPr>
+        <p:spPr>
+          <a:xfrm>
+            <a:off x="3848100" y="4305300"/>
             <a:ext cx="1524000" cy="514350"/>
           </a:xfrm>
           <a:prstGeom prst="rect">
@@ -20228,21 +20458,21 @@
       </p:sp>
       <p:sp>
         <p:nvSpPr>
-          <p:cNvPr id="60" name="Rectangle 59">
-            <a:extLst>
-              <a:ext uri="{FF2B5EF4-FFF2-40B4-BE49-F238E27FC236}">
-                <a16:creationId xmlns:a16="http://schemas.microsoft.com/office/drawing/2014/main" id="{77D9BA52-7C1F-4E96-8BF7-CE4564B901DF}"/>
-              </a:ext>
-            </a:extLst>
-          </p:cNvPr>
-          <p:cNvSpPr>
-            <a:spLocks noGrp="1"/>
-          </p:cNvSpPr>
-          <p:nvPr/>
-        </p:nvSpPr>
-        <p:spPr>
-          <a:xfrm>
-            <a:off x="2419350" y="4381500"/>
+          <p:cNvPr id="62" name="Rectangle 61">
+            <a:extLst>
+              <a:ext uri="{FF2B5EF4-FFF2-40B4-BE49-F238E27FC236}">
+                <a16:creationId xmlns:a16="http://schemas.microsoft.com/office/drawing/2014/main" id="{0F94ADDD-A7D3-4E6F-BE25-29F873F82F45}"/>
+              </a:ext>
+            </a:extLst>
+          </p:cNvPr>
+          <p:cNvSpPr>
+            <a:spLocks noGrp="1"/>
+          </p:cNvSpPr>
+          <p:nvPr/>
+        </p:nvSpPr>
+        <p:spPr>
+          <a:xfrm>
+            <a:off x="3943350" y="4381500"/>
             <a:ext cx="1333500" cy="361950"/>
           </a:xfrm>
           <a:prstGeom prst="rect">
@@ -20267,40 +20497,53 @@
           <a:lstStyle/>
           <a:p>
             <a:pPr algn="ctr">
-              <a:defRPr sz="1125" b="0">
-                <a:solidFill>
-                  <a:srgbClr val="44546A"/>
-                </a:solidFill>
-              </a:defRPr>
-            </a:pPr>
-            <a:r>
-              <a:rPr sz="1125" b="0">
-                <a:solidFill>
-                  <a:srgbClr val="44546A"/>
-                </a:solidFill>
-              </a:rPr>
-              <a:t>0.6110</a:t>
-            </a:r>
-          </a:p>
-        </p:txBody>
-      </p:sp>
-      <p:sp>
-        <p:nvSpPr>
-          <p:cNvPr id="61" name="Rectangle 60">
-            <a:extLst>
-              <a:ext uri="{FF2B5EF4-FFF2-40B4-BE49-F238E27FC236}">
-                <a16:creationId xmlns:a16="http://schemas.microsoft.com/office/drawing/2014/main" id="{18971F44-7A04-4B0F-9BA2-0D778126EA46}"/>
-              </a:ext>
-            </a:extLst>
-          </p:cNvPr>
-          <p:cNvSpPr>
-            <a:spLocks noGrp="1"/>
-          </p:cNvSpPr>
-          <p:nvPr/>
-        </p:nvSpPr>
-        <p:spPr>
-          <a:xfrm>
-            <a:off x="3848100" y="4305300"/>
+              <a:defRPr sz="1125" b="1">
+                <a:solidFill>
+                  <a:srgbClr val="44546A"/>
+                </a:solidFill>
+              </a:defRPr>
+            </a:pPr>
+            <a:r>
+              <a:rPr sz="1125" b="1" dirty="0">
+                <a:solidFill>
+                  <a:srgbClr val="44546A"/>
+                </a:solidFill>
+              </a:rPr>
+              <a:t>0.3</a:t>
+            </a:r>
+            <a:r>
+              <a:rPr lang="en-US" sz="1125" b="1" dirty="0">
+                <a:solidFill>
+                  <a:srgbClr val="44546A"/>
+                </a:solidFill>
+              </a:rPr>
+              <a:t>539</a:t>
+            </a:r>
+            <a:endParaRPr sz="1125" b="1" dirty="0">
+              <a:solidFill>
+                <a:srgbClr val="44546A"/>
+              </a:solidFill>
+            </a:endParaRPr>
+          </a:p>
+        </p:txBody>
+      </p:sp>
+      <p:sp>
+        <p:nvSpPr>
+          <p:cNvPr id="63" name="Rectangle 62">
+            <a:extLst>
+              <a:ext uri="{FF2B5EF4-FFF2-40B4-BE49-F238E27FC236}">
+                <a16:creationId xmlns:a16="http://schemas.microsoft.com/office/drawing/2014/main" id="{770CFBDE-83F3-4BC8-A755-7E38B7F05091}"/>
+              </a:ext>
+            </a:extLst>
+          </p:cNvPr>
+          <p:cNvSpPr>
+            <a:spLocks noGrp="1"/>
+          </p:cNvSpPr>
+          <p:nvPr/>
+        </p:nvSpPr>
+        <p:spPr>
+          <a:xfrm>
+            <a:off x="5372100" y="4305300"/>
             <a:ext cx="1524000" cy="514350"/>
           </a:xfrm>
           <a:prstGeom prst="rect">
@@ -20326,21 +20569,21 @@
       </p:sp>
       <p:sp>
         <p:nvSpPr>
-          <p:cNvPr id="62" name="Rectangle 61">
-            <a:extLst>
-              <a:ext uri="{FF2B5EF4-FFF2-40B4-BE49-F238E27FC236}">
-                <a16:creationId xmlns:a16="http://schemas.microsoft.com/office/drawing/2014/main" id="{0F94ADDD-A7D3-4E6F-BE25-29F873F82F45}"/>
-              </a:ext>
-            </a:extLst>
-          </p:cNvPr>
-          <p:cNvSpPr>
-            <a:spLocks noGrp="1"/>
-          </p:cNvSpPr>
-          <p:nvPr/>
-        </p:nvSpPr>
-        <p:spPr>
-          <a:xfrm>
-            <a:off x="3943350" y="4381500"/>
+          <p:cNvPr id="64" name="Rectangle 63">
+            <a:extLst>
+              <a:ext uri="{FF2B5EF4-FFF2-40B4-BE49-F238E27FC236}">
+                <a16:creationId xmlns:a16="http://schemas.microsoft.com/office/drawing/2014/main" id="{6CCB1E4B-2CCB-4030-954E-79C522F8F4D1}"/>
+              </a:ext>
+            </a:extLst>
+          </p:cNvPr>
+          <p:cNvSpPr>
+            <a:spLocks noGrp="1"/>
+          </p:cNvSpPr>
+          <p:nvPr/>
+        </p:nvSpPr>
+        <p:spPr>
+          <a:xfrm>
+            <a:off x="5467350" y="4381500"/>
             <a:ext cx="1333500" cy="361950"/>
           </a:xfrm>
           <a:prstGeom prst="rect">
@@ -20372,33 +20615,46 @@
               </a:defRPr>
             </a:pPr>
             <a:r>
-              <a:rPr sz="1125" b="1">
-                <a:solidFill>
-                  <a:srgbClr val="44546A"/>
-                </a:solidFill>
-              </a:rPr>
-              <a:t>0.3332</a:t>
-            </a:r>
-          </a:p>
-        </p:txBody>
-      </p:sp>
-      <p:sp>
-        <p:nvSpPr>
-          <p:cNvPr id="63" name="Rectangle 62">
-            <a:extLst>
-              <a:ext uri="{FF2B5EF4-FFF2-40B4-BE49-F238E27FC236}">
-                <a16:creationId xmlns:a16="http://schemas.microsoft.com/office/drawing/2014/main" id="{770CFBDE-83F3-4BC8-A755-7E38B7F05091}"/>
-              </a:ext>
-            </a:extLst>
-          </p:cNvPr>
-          <p:cNvSpPr>
-            <a:spLocks noGrp="1"/>
-          </p:cNvSpPr>
-          <p:nvPr/>
-        </p:nvSpPr>
-        <p:spPr>
-          <a:xfrm>
-            <a:off x="5372100" y="4305300"/>
+              <a:rPr sz="1125" b="1" dirty="0">
+                <a:solidFill>
+                  <a:srgbClr val="44546A"/>
+                </a:solidFill>
+              </a:rPr>
+              <a:t>0.3</a:t>
+            </a:r>
+            <a:r>
+              <a:rPr lang="en-US" sz="1125" b="1" dirty="0">
+                <a:solidFill>
+                  <a:srgbClr val="44546A"/>
+                </a:solidFill>
+              </a:rPr>
+              <a:t>366</a:t>
+            </a:r>
+            <a:endParaRPr sz="1125" b="1" dirty="0">
+              <a:solidFill>
+                <a:srgbClr val="44546A"/>
+              </a:solidFill>
+            </a:endParaRPr>
+          </a:p>
+        </p:txBody>
+      </p:sp>
+      <p:sp>
+        <p:nvSpPr>
+          <p:cNvPr id="65" name="Rectangle 64">
+            <a:extLst>
+              <a:ext uri="{FF2B5EF4-FFF2-40B4-BE49-F238E27FC236}">
+                <a16:creationId xmlns:a16="http://schemas.microsoft.com/office/drawing/2014/main" id="{8FE2FB91-D457-41C2-83FF-FE7A3FBF252C}"/>
+              </a:ext>
+            </a:extLst>
+          </p:cNvPr>
+          <p:cNvSpPr>
+            <a:spLocks noGrp="1"/>
+          </p:cNvSpPr>
+          <p:nvPr/>
+        </p:nvSpPr>
+        <p:spPr>
+          <a:xfrm>
+            <a:off x="6896100" y="4305300"/>
             <a:ext cx="1524000" cy="514350"/>
           </a:xfrm>
           <a:prstGeom prst="rect">
@@ -20424,21 +20680,21 @@
       </p:sp>
       <p:sp>
         <p:nvSpPr>
-          <p:cNvPr id="64" name="Rectangle 63">
-            <a:extLst>
-              <a:ext uri="{FF2B5EF4-FFF2-40B4-BE49-F238E27FC236}">
-                <a16:creationId xmlns:a16="http://schemas.microsoft.com/office/drawing/2014/main" id="{6CCB1E4B-2CCB-4030-954E-79C522F8F4D1}"/>
-              </a:ext>
-            </a:extLst>
-          </p:cNvPr>
-          <p:cNvSpPr>
-            <a:spLocks noGrp="1"/>
-          </p:cNvSpPr>
-          <p:nvPr/>
-        </p:nvSpPr>
-        <p:spPr>
-          <a:xfrm>
-            <a:off x="5467350" y="4381500"/>
+          <p:cNvPr id="66" name="Rectangle 65">
+            <a:extLst>
+              <a:ext uri="{FF2B5EF4-FFF2-40B4-BE49-F238E27FC236}">
+                <a16:creationId xmlns:a16="http://schemas.microsoft.com/office/drawing/2014/main" id="{3F37B6AD-D651-4381-9F8F-4C3FFCD7B2ED}"/>
+              </a:ext>
+            </a:extLst>
+          </p:cNvPr>
+          <p:cNvSpPr>
+            <a:spLocks noGrp="1"/>
+          </p:cNvSpPr>
+          <p:nvPr/>
+        </p:nvSpPr>
+        <p:spPr>
+          <a:xfrm>
+            <a:off x="6991350" y="4381500"/>
             <a:ext cx="1333500" cy="361950"/>
           </a:xfrm>
           <a:prstGeom prst="rect">
@@ -20470,111 +20726,26 @@
               </a:defRPr>
             </a:pPr>
             <a:r>
-              <a:rPr sz="1125" b="1">
-                <a:solidFill>
-                  <a:srgbClr val="44546A"/>
-                </a:solidFill>
-              </a:rPr>
-              <a:t>0.3141</a:t>
-            </a:r>
-          </a:p>
-        </p:txBody>
-      </p:sp>
-      <p:sp>
-        <p:nvSpPr>
-          <p:cNvPr id="65" name="Rectangle 64">
-            <a:extLst>
-              <a:ext uri="{FF2B5EF4-FFF2-40B4-BE49-F238E27FC236}">
-                <a16:creationId xmlns:a16="http://schemas.microsoft.com/office/drawing/2014/main" id="{8FE2FB91-D457-41C2-83FF-FE7A3FBF252C}"/>
-              </a:ext>
-            </a:extLst>
-          </p:cNvPr>
-          <p:cNvSpPr>
-            <a:spLocks noGrp="1"/>
-          </p:cNvSpPr>
-          <p:nvPr/>
-        </p:nvSpPr>
-        <p:spPr>
-          <a:xfrm>
-            <a:off x="6896100" y="4305300"/>
-            <a:ext cx="1524000" cy="514350"/>
-          </a:xfrm>
-          <a:prstGeom prst="rect">
-            <a:avLst/>
-          </a:prstGeom>
-          <a:solidFill>
-            <a:srgbClr val="EEF5FC"/>
-          </a:solidFill>
-          <a:ln w="9525">
-            <a:solidFill>
-              <a:srgbClr val="D9D9D9"/>
-            </a:solidFill>
-            <a:prstDash val="solid"/>
-          </a:ln>
-        </p:spPr>
-        <p:txBody>
-          <a:bodyPr/>
-          <a:lstStyle/>
-          <a:p>
-            <a:endParaRPr lang="en-US"/>
-          </a:p>
-        </p:txBody>
-      </p:sp>
-      <p:sp>
-        <p:nvSpPr>
-          <p:cNvPr id="66" name="Rectangle 65">
-            <a:extLst>
-              <a:ext uri="{FF2B5EF4-FFF2-40B4-BE49-F238E27FC236}">
-                <a16:creationId xmlns:a16="http://schemas.microsoft.com/office/drawing/2014/main" id="{3F37B6AD-D651-4381-9F8F-4C3FFCD7B2ED}"/>
-              </a:ext>
-            </a:extLst>
-          </p:cNvPr>
-          <p:cNvSpPr>
-            <a:spLocks noGrp="1"/>
-          </p:cNvSpPr>
-          <p:nvPr/>
-        </p:nvSpPr>
-        <p:spPr>
-          <a:xfrm>
-            <a:off x="6991350" y="4381500"/>
-            <a:ext cx="1333500" cy="361950"/>
-          </a:xfrm>
-          <a:prstGeom prst="rect">
-            <a:avLst/>
-          </a:prstGeom>
-          <a:solidFill>
-            <a:srgbClr val="000000">
-              <a:alpha val="0"/>
-            </a:srgbClr>
-          </a:solidFill>
-          <a:ln w="0">
-            <a:solidFill>
-              <a:srgbClr val="000000">
-                <a:alpha val="0"/>
-              </a:srgbClr>
-            </a:solidFill>
-            <a:prstDash val="solid"/>
-          </a:ln>
-        </p:spPr>
-        <p:txBody>
-          <a:bodyPr lIns="0" tIns="0" rIns="0" bIns="0" anchor="ctr"/>
-          <a:lstStyle/>
-          <a:p>
-            <a:pPr algn="ctr">
-              <a:defRPr sz="1125" b="1">
-                <a:solidFill>
-                  <a:srgbClr val="44546A"/>
-                </a:solidFill>
-              </a:defRPr>
-            </a:pPr>
-            <a:r>
-              <a:rPr sz="1125" b="1">
-                <a:solidFill>
-                  <a:srgbClr val="44546A"/>
-                </a:solidFill>
-              </a:rPr>
-              <a:t>0.3716</a:t>
-            </a:r>
+              <a:rPr sz="1125" b="1" dirty="0">
+                <a:solidFill>
+                  <a:srgbClr val="44546A"/>
+                </a:solidFill>
+              </a:rPr>
+              <a:t>0.3</a:t>
+            </a:r>
+            <a:r>
+              <a:rPr lang="en-US" sz="1125" b="1" dirty="0">
+                <a:solidFill>
+                  <a:srgbClr val="44546A"/>
+                </a:solidFill>
+              </a:rPr>
+              <a:t>962</a:t>
+            </a:r>
+            <a:endParaRPr sz="1125" b="1" dirty="0">
+              <a:solidFill>
+                <a:srgbClr val="44546A"/>
+              </a:solidFill>
+            </a:endParaRPr>
           </a:p>
         </p:txBody>
       </p:sp>
@@ -21033,64 +21204,6 @@
       </p:sp>
       <p:sp>
         <p:nvSpPr>
-          <p:cNvPr id="73" name="Rectangle 72">
-            <a:extLst>
-              <a:ext uri="{FF2B5EF4-FFF2-40B4-BE49-F238E27FC236}">
-                <a16:creationId xmlns:a16="http://schemas.microsoft.com/office/drawing/2014/main" id="{EF0F2E7F-5712-43D4-ABD3-31B52A2AC458}"/>
-              </a:ext>
-            </a:extLst>
-          </p:cNvPr>
-          <p:cNvSpPr>
-            <a:spLocks noGrp="1"/>
-          </p:cNvSpPr>
-          <p:nvPr/>
-        </p:nvSpPr>
-        <p:spPr>
-          <a:xfrm>
-            <a:off x="590550" y="6534150"/>
-            <a:ext cx="9906000" cy="171450"/>
-          </a:xfrm>
-          <a:prstGeom prst="rect">
-            <a:avLst/>
-          </a:prstGeom>
-          <a:solidFill>
-            <a:srgbClr val="000000">
-              <a:alpha val="0"/>
-            </a:srgbClr>
-          </a:solidFill>
-          <a:ln w="0">
-            <a:solidFill>
-              <a:srgbClr val="000000">
-                <a:alpha val="0"/>
-              </a:srgbClr>
-            </a:solidFill>
-            <a:prstDash val="solid"/>
-          </a:ln>
-        </p:spPr>
-        <p:txBody>
-          <a:bodyPr lIns="0" tIns="0" rIns="0" bIns="0" anchor="t"/>
-          <a:lstStyle/>
-          <a:p>
-            <a:pPr algn="l">
-              <a:defRPr sz="750" b="0">
-                <a:solidFill>
-                  <a:srgbClr val="6B7280"/>
-                </a:solidFill>
-              </a:defRPr>
-            </a:pPr>
-            <a:r>
-              <a:rPr sz="750" b="0">
-                <a:solidFill>
-                  <a:srgbClr val="6B7280"/>
-                </a:solidFill>
-              </a:rPr>
-              <a:t>Best AUC: Logistic Regression 0.6112. Best MRR / nDCG: LightGBM 0.3332 / 0.3141 / 0.3716.</a:t>
-            </a:r>
-          </a:p>
-        </p:txBody>
-      </p:sp>
-      <p:sp>
-        <p:nvSpPr>
           <p:cNvPr id="75" name="Rectangle 74">
             <a:extLst>
               <a:ext uri="{FF2B5EF4-FFF2-40B4-BE49-F238E27FC236}">
@@ -21157,6 +21270,77 @@
           </a:prstGeom>
         </p:spPr>
       </p:pic>
+      <p:sp>
+        <p:nvSpPr>
+          <p:cNvPr id="2" name="Rectangle 1">
+            <a:extLst>
+              <a:ext uri="{FF2B5EF4-FFF2-40B4-BE49-F238E27FC236}">
+                <a16:creationId xmlns:a16="http://schemas.microsoft.com/office/drawing/2014/main" id="{1D17210E-9FFB-65A8-FF95-D24CF414D4C7}"/>
+              </a:ext>
+            </a:extLst>
+          </p:cNvPr>
+          <p:cNvSpPr>
+            <a:spLocks noGrp="1"/>
+          </p:cNvSpPr>
+          <p:nvPr/>
+        </p:nvSpPr>
+        <p:spPr>
+          <a:xfrm>
+            <a:off x="2419350" y="3861777"/>
+            <a:ext cx="1333500" cy="361950"/>
+          </a:xfrm>
+          <a:prstGeom prst="rect">
+            <a:avLst/>
+          </a:prstGeom>
+          <a:solidFill>
+            <a:srgbClr val="000000">
+              <a:alpha val="0"/>
+            </a:srgbClr>
+          </a:solidFill>
+          <a:ln w="0">
+            <a:solidFill>
+              <a:srgbClr val="000000">
+                <a:alpha val="0"/>
+              </a:srgbClr>
+            </a:solidFill>
+            <a:prstDash val="solid"/>
+          </a:ln>
+        </p:spPr>
+        <p:txBody>
+          <a:bodyPr lIns="0" tIns="0" rIns="0" bIns="0" anchor="ctr"/>
+          <a:lstStyle/>
+          <a:p>
+            <a:pPr algn="ctr">
+              <a:defRPr sz="1125" b="0">
+                <a:solidFill>
+                  <a:srgbClr val="44546A"/>
+                </a:solidFill>
+              </a:defRPr>
+            </a:pPr>
+            <a:r>
+              <a:rPr sz="1125" b="0" dirty="0">
+                <a:solidFill>
+                  <a:srgbClr val="44546A"/>
+                </a:solidFill>
+              </a:rPr>
+              <a:t>0.</a:t>
+            </a:r>
+            <a:r>
+              <a:rPr lang="en-US" sz="1125" b="0" dirty="0">
+                <a:solidFill>
+                  <a:srgbClr val="44546A"/>
+                </a:solidFill>
+              </a:rPr>
+              <a:t>6112</a:t>
+            </a:r>
+            <a:endParaRPr sz="1125" b="0" dirty="0">
+              <a:solidFill>
+                <a:srgbClr val="44546A"/>
+              </a:solidFill>
+            </a:endParaRPr>
+          </a:p>
+        </p:txBody>
+      </p:sp>
     </p:spTree>
     <p:extLst>
       <p:ext uri="{BB962C8B-B14F-4D97-AF65-F5344CB8AC3E}">
@@ -25519,164 +25703,6 @@
       </p:sp>
       <p:sp>
         <p:nvSpPr>
-          <p:cNvPr id="29" name="Rounded Rectangle 28">
-            <a:extLst>
-              <a:ext uri="{FF2B5EF4-FFF2-40B4-BE49-F238E27FC236}">
-                <a16:creationId xmlns:a16="http://schemas.microsoft.com/office/drawing/2014/main" id="{F9D7FD29-0895-48FA-BD02-A617E58461B1}"/>
-              </a:ext>
-            </a:extLst>
-          </p:cNvPr>
-          <p:cNvSpPr>
-            <a:spLocks noGrp="1"/>
-          </p:cNvSpPr>
-          <p:nvPr/>
-        </p:nvSpPr>
-        <p:spPr>
-          <a:xfrm>
-            <a:off x="8077200" y="3086100"/>
-            <a:ext cx="3505200" cy="1657350"/>
-          </a:xfrm>
-          <a:prstGeom prst="roundRect">
-            <a:avLst>
-              <a:gd name="adj" fmla="val 4598"/>
-            </a:avLst>
-          </a:prstGeom>
-          <a:solidFill>
-            <a:srgbClr val="EEF5FC"/>
-          </a:solidFill>
-          <a:ln w="9525">
-            <a:solidFill>
-              <a:srgbClr val="D9D9D9"/>
-            </a:solidFill>
-            <a:prstDash val="solid"/>
-          </a:ln>
-        </p:spPr>
-        <p:txBody>
-          <a:bodyPr/>
-          <a:lstStyle/>
-          <a:p>
-            <a:endParaRPr lang="en-US"/>
-          </a:p>
-        </p:txBody>
-      </p:sp>
-      <p:sp>
-        <p:nvSpPr>
-          <p:cNvPr id="30" name="Rectangle 29">
-            <a:extLst>
-              <a:ext uri="{FF2B5EF4-FFF2-40B4-BE49-F238E27FC236}">
-                <a16:creationId xmlns:a16="http://schemas.microsoft.com/office/drawing/2014/main" id="{1D4E0C71-6BE6-424E-9AC0-A1410046B0EA}"/>
-              </a:ext>
-            </a:extLst>
-          </p:cNvPr>
-          <p:cNvSpPr>
-            <a:spLocks noGrp="1"/>
-          </p:cNvSpPr>
-          <p:nvPr/>
-        </p:nvSpPr>
-        <p:spPr>
-          <a:xfrm>
-            <a:off x="8248650" y="3219450"/>
-            <a:ext cx="3162300" cy="228600"/>
-          </a:xfrm>
-          <a:prstGeom prst="rect">
-            <a:avLst/>
-          </a:prstGeom>
-          <a:solidFill>
-            <a:srgbClr val="000000">
-              <a:alpha val="0"/>
-            </a:srgbClr>
-          </a:solidFill>
-          <a:ln w="0">
-            <a:solidFill>
-              <a:srgbClr val="000000">
-                <a:alpha val="0"/>
-              </a:srgbClr>
-            </a:solidFill>
-            <a:prstDash val="solid"/>
-          </a:ln>
-        </p:spPr>
-        <p:txBody>
-          <a:bodyPr lIns="0" tIns="0" rIns="0" bIns="0" anchor="t"/>
-          <a:lstStyle/>
-          <a:p>
-            <a:pPr algn="l">
-              <a:defRPr sz="1050" b="1">
-                <a:solidFill>
-                  <a:srgbClr val="4472C4"/>
-                </a:solidFill>
-              </a:defRPr>
-            </a:pPr>
-            <a:r>
-              <a:rPr sz="1050" b="1">
-                <a:solidFill>
-                  <a:srgbClr val="4472C4"/>
-                </a:solidFill>
-              </a:rPr>
-              <a:t>DOWNLOAD SPLITS</a:t>
-            </a:r>
-          </a:p>
-        </p:txBody>
-      </p:sp>
-      <p:sp>
-        <p:nvSpPr>
-          <p:cNvPr id="31" name="Rectangle 30">
-            <a:extLst>
-              <a:ext uri="{FF2B5EF4-FFF2-40B4-BE49-F238E27FC236}">
-                <a16:creationId xmlns:a16="http://schemas.microsoft.com/office/drawing/2014/main" id="{4B47F5E7-A484-4BEE-AC6B-8730CC8782B1}"/>
-              </a:ext>
-            </a:extLst>
-          </p:cNvPr>
-          <p:cNvSpPr>
-            <a:spLocks noGrp="1"/>
-          </p:cNvSpPr>
-          <p:nvPr/>
-        </p:nvSpPr>
-        <p:spPr>
-          <a:xfrm>
-            <a:off x="8248650" y="3505200"/>
-            <a:ext cx="3162300" cy="1123950"/>
-          </a:xfrm>
-          <a:prstGeom prst="rect">
-            <a:avLst/>
-          </a:prstGeom>
-          <a:solidFill>
-            <a:srgbClr val="000000">
-              <a:alpha val="0"/>
-            </a:srgbClr>
-          </a:solidFill>
-          <a:ln w="0">
-            <a:solidFill>
-              <a:srgbClr val="000000">
-                <a:alpha val="0"/>
-              </a:srgbClr>
-            </a:solidFill>
-            <a:prstDash val="solid"/>
-          </a:ln>
-        </p:spPr>
-        <p:txBody>
-          <a:bodyPr lIns="0" tIns="0" rIns="0" bIns="0" anchor="t"/>
-          <a:lstStyle/>
-          <a:p>
-            <a:pPr algn="l">
-              <a:defRPr sz="1275" b="0">
-                <a:solidFill>
-                  <a:srgbClr val="44546A"/>
-                </a:solidFill>
-              </a:defRPr>
-            </a:pPr>
-            <a:r>
-              <a:rPr sz="1275" b="0">
-                <a:solidFill>
-                  <a:srgbClr val="44546A"/>
-                </a:solidFill>
-              </a:rPr>
-              <a:t>The site provides training, validation, and test sets. It also links to Microsoft Azure Open Datasets for easier cloud access to the large-scale version.</a:t>
-            </a:r>
-          </a:p>
-        </p:txBody>
-      </p:sp>
-      <p:sp>
-        <p:nvSpPr>
           <p:cNvPr id="32" name="Rounded Rectangle 31">
             <a:extLst>
               <a:ext uri="{FF2B5EF4-FFF2-40B4-BE49-F238E27FC236}">
@@ -26175,7 +26201,7 @@
               </a:defRPr>
             </a:pPr>
             <a:r>
-              <a:rPr sz="2400" b="1">
+              <a:rPr sz="2400" b="1" dirty="0">
                 <a:solidFill>
                   <a:srgbClr val="000000"/>
                 </a:solidFill>
@@ -26259,7 +26285,7 @@
         </p:nvSpPr>
         <p:spPr>
           <a:xfrm>
-            <a:off x="609600" y="1676400"/>
+            <a:off x="514350" y="1465331"/>
             <a:ext cx="5143500" cy="2266950"/>
           </a:xfrm>
           <a:prstGeom prst="roundRect">
@@ -26301,7 +26327,7 @@
         </p:nvSpPr>
         <p:spPr>
           <a:xfrm>
-            <a:off x="781050" y="1809750"/>
+            <a:off x="685800" y="1598681"/>
             <a:ext cx="4800600" cy="228600"/>
           </a:xfrm>
           <a:prstGeom prst="rect">
@@ -26359,7 +26385,7 @@
         </p:nvSpPr>
         <p:spPr>
           <a:xfrm>
-            <a:off x="781050" y="2095500"/>
+            <a:off x="685800" y="1884431"/>
             <a:ext cx="4800600" cy="1733550"/>
           </a:xfrm>
           <a:prstGeom prst="rect">
@@ -26533,7 +26559,7 @@
         </p:nvSpPr>
         <p:spPr>
           <a:xfrm>
-            <a:off x="6057900" y="1758724"/>
+            <a:off x="6044669" y="1450192"/>
             <a:ext cx="5524500" cy="2266950"/>
           </a:xfrm>
           <a:prstGeom prst="roundRect">
@@ -26575,7 +26601,7 @@
         </p:nvSpPr>
         <p:spPr>
           <a:xfrm>
-            <a:off x="6229350" y="1809750"/>
+            <a:off x="6216119" y="1501218"/>
             <a:ext cx="5181600" cy="228600"/>
           </a:xfrm>
           <a:prstGeom prst="rect">
@@ -26633,7 +26659,7 @@
         </p:nvSpPr>
         <p:spPr>
           <a:xfrm>
-            <a:off x="6229350" y="2095500"/>
+            <a:off x="6216119" y="1786968"/>
             <a:ext cx="5181600" cy="1733550"/>
           </a:xfrm>
           <a:prstGeom prst="rect">
@@ -26665,7 +26691,7 @@
               </a:defRPr>
             </a:pPr>
             <a:r>
-              <a:rPr sz="1350" b="0">
+              <a:rPr sz="1350" b="0" dirty="0">
                 <a:solidFill>
                   <a:srgbClr val="44546A"/>
                 </a:solidFill>
@@ -26674,7 +26700,7 @@
             </a:r>
           </a:p>
           <a:p>
-            <a:endParaRPr sz="1350" b="0">
+            <a:endParaRPr sz="1350" b="0" dirty="0">
               <a:solidFill>
                 <a:srgbClr val="44546A"/>
               </a:solidFill>
@@ -26689,7 +26715,7 @@
               </a:defRPr>
             </a:pPr>
             <a:r>
-              <a:rPr sz="1350" b="0">
+              <a:rPr sz="1350" b="0" dirty="0">
                 <a:solidFill>
                   <a:srgbClr val="44546A"/>
                 </a:solidFill>
@@ -26706,7 +26732,7 @@
               </a:defRPr>
             </a:pPr>
             <a:r>
-              <a:rPr sz="1350" b="0">
+              <a:rPr sz="1350" b="0" dirty="0">
                 <a:solidFill>
                   <a:srgbClr val="44546A"/>
                 </a:solidFill>
@@ -26723,7 +26749,7 @@
               </a:defRPr>
             </a:pPr>
             <a:r>
-              <a:rPr sz="1350" b="0">
+              <a:rPr sz="1350" b="0" dirty="0">
                 <a:solidFill>
                   <a:srgbClr val="44546A"/>
                 </a:solidFill>
@@ -26740,7 +26766,7 @@
               </a:defRPr>
             </a:pPr>
             <a:r>
-              <a:rPr sz="1350" b="0">
+              <a:rPr sz="1350" b="0" dirty="0">
                 <a:solidFill>
                   <a:srgbClr val="44546A"/>
                 </a:solidFill>
@@ -26757,7 +26783,7 @@
               </a:defRPr>
             </a:pPr>
             <a:r>
-              <a:rPr sz="1350" b="0">
+              <a:rPr sz="1350" b="0" dirty="0">
                 <a:solidFill>
                   <a:srgbClr val="44546A"/>
                 </a:solidFill>
@@ -26766,7 +26792,7 @@
             </a:r>
           </a:p>
           <a:p>
-            <a:endParaRPr sz="1350" b="0">
+            <a:endParaRPr sz="1350" b="0" dirty="0">
               <a:solidFill>
                 <a:srgbClr val="44546A"/>
               </a:solidFill>
@@ -26781,7 +26807,7 @@
               </a:defRPr>
             </a:pPr>
             <a:r>
-              <a:rPr sz="1350" b="0">
+              <a:rPr sz="1350" b="0" dirty="0">
                 <a:solidFill>
                   <a:srgbClr val="44546A"/>
                 </a:solidFill>
@@ -26793,64 +26819,22 @@
       </p:sp>
       <p:sp>
         <p:nvSpPr>
-          <p:cNvPr id="13" name="Rounded Rectangle 12">
-            <a:extLst>
-              <a:ext uri="{FF2B5EF4-FFF2-40B4-BE49-F238E27FC236}">
-                <a16:creationId xmlns:a16="http://schemas.microsoft.com/office/drawing/2014/main" id="{4B28A282-E491-4FE3-8671-91517CFDBEEE}"/>
-              </a:ext>
-            </a:extLst>
-          </p:cNvPr>
-          <p:cNvSpPr>
-            <a:spLocks noGrp="1"/>
-          </p:cNvSpPr>
-          <p:nvPr/>
-        </p:nvSpPr>
-        <p:spPr>
-          <a:xfrm>
-            <a:off x="609600" y="4580164"/>
-            <a:ext cx="5143500" cy="1371600"/>
-          </a:xfrm>
-          <a:prstGeom prst="roundRect">
-            <a:avLst>
-              <a:gd name="adj" fmla="val 5556"/>
-            </a:avLst>
-          </a:prstGeom>
-          <a:solidFill>
-            <a:srgbClr val="FFFFFF"/>
-          </a:solidFill>
-          <a:ln w="9525">
-            <a:solidFill>
-              <a:srgbClr val="D9D9D9"/>
-            </a:solidFill>
-            <a:prstDash val="solid"/>
-          </a:ln>
-        </p:spPr>
-        <p:txBody>
-          <a:bodyPr/>
-          <a:lstStyle/>
-          <a:p>
-            <a:endParaRPr lang="en-US"/>
-          </a:p>
-        </p:txBody>
-      </p:sp>
-      <p:sp>
-        <p:nvSpPr>
-          <p:cNvPr id="14" name="Rectangle 13">
-            <a:extLst>
-              <a:ext uri="{FF2B5EF4-FFF2-40B4-BE49-F238E27FC236}">
-                <a16:creationId xmlns:a16="http://schemas.microsoft.com/office/drawing/2014/main" id="{A76CEB3E-CD7B-4D27-9778-2099A68A2562}"/>
-              </a:ext>
-            </a:extLst>
-          </p:cNvPr>
-          <p:cNvSpPr>
-            <a:spLocks noGrp="1"/>
-          </p:cNvSpPr>
-          <p:nvPr/>
-        </p:nvSpPr>
-        <p:spPr>
-          <a:xfrm>
-            <a:off x="781050" y="4713514"/>
-            <a:ext cx="4800600" cy="228600"/>
+          <p:cNvPr id="19" name="Rectangle 18">
+            <a:extLst>
+              <a:ext uri="{FF2B5EF4-FFF2-40B4-BE49-F238E27FC236}">
+                <a16:creationId xmlns:a16="http://schemas.microsoft.com/office/drawing/2014/main" id="{4B72E9E8-0D48-4FA5-863D-146D3B513E7F}"/>
+              </a:ext>
+            </a:extLst>
+          </p:cNvPr>
+          <p:cNvSpPr>
+            <a:spLocks noGrp="1"/>
+          </p:cNvSpPr>
+          <p:nvPr/>
+        </p:nvSpPr>
+        <p:spPr>
+          <a:xfrm>
+            <a:off x="574221" y="6396053"/>
+            <a:ext cx="10668000" cy="171450"/>
           </a:xfrm>
           <a:prstGeom prst="rect">
             <a:avLst/>
@@ -26874,280 +26858,6 @@
           <a:lstStyle/>
           <a:p>
             <a:pPr algn="l">
-              <a:defRPr sz="1050" b="1">
-                <a:solidFill>
-                  <a:srgbClr val="4472C4"/>
-                </a:solidFill>
-              </a:defRPr>
-            </a:pPr>
-            <a:r>
-              <a:rPr sz="1050" b="1">
-                <a:solidFill>
-                  <a:srgbClr val="4472C4"/>
-                </a:solidFill>
-              </a:rPr>
-              <a:t>HOW THEY WORK TOGETHER</a:t>
-            </a:r>
-          </a:p>
-        </p:txBody>
-      </p:sp>
-      <p:sp>
-        <p:nvSpPr>
-          <p:cNvPr id="15" name="Rectangle 14">
-            <a:extLst>
-              <a:ext uri="{FF2B5EF4-FFF2-40B4-BE49-F238E27FC236}">
-                <a16:creationId xmlns:a16="http://schemas.microsoft.com/office/drawing/2014/main" id="{B72CE856-0D07-45D4-A774-77221B7E00DD}"/>
-              </a:ext>
-            </a:extLst>
-          </p:cNvPr>
-          <p:cNvSpPr>
-            <a:spLocks noGrp="1"/>
-          </p:cNvSpPr>
-          <p:nvPr/>
-        </p:nvSpPr>
-        <p:spPr>
-          <a:xfrm>
-            <a:off x="781050" y="4999264"/>
-            <a:ext cx="4800600" cy="838200"/>
-          </a:xfrm>
-          <a:prstGeom prst="rect">
-            <a:avLst/>
-          </a:prstGeom>
-          <a:solidFill>
-            <a:srgbClr val="000000">
-              <a:alpha val="0"/>
-            </a:srgbClr>
-          </a:solidFill>
-          <a:ln w="0">
-            <a:solidFill>
-              <a:srgbClr val="000000">
-                <a:alpha val="0"/>
-              </a:srgbClr>
-            </a:solidFill>
-            <a:prstDash val="solid"/>
-          </a:ln>
-        </p:spPr>
-        <p:txBody>
-          <a:bodyPr lIns="0" tIns="0" rIns="0" bIns="0" anchor="t"/>
-          <a:lstStyle/>
-          <a:p>
-            <a:pPr algn="l">
-              <a:defRPr sz="1350" b="0">
-                <a:solidFill>
-                  <a:srgbClr val="44546A"/>
-                </a:solidFill>
-              </a:defRPr>
-            </a:pPr>
-            <a:r>
-              <a:rPr sz="1350" b="0">
-                <a:solidFill>
-                  <a:srgbClr val="44546A"/>
-                </a:solidFill>
-              </a:rPr>
-              <a:t>Most pipelines merge article features from news.tsv with candidate rows expanded from behaviors.tsv. That creates the candidate-level training table used by recall and ranking models.</a:t>
-            </a:r>
-          </a:p>
-        </p:txBody>
-      </p:sp>
-      <p:sp>
-        <p:nvSpPr>
-          <p:cNvPr id="16" name="Rounded Rectangle 15">
-            <a:extLst>
-              <a:ext uri="{FF2B5EF4-FFF2-40B4-BE49-F238E27FC236}">
-                <a16:creationId xmlns:a16="http://schemas.microsoft.com/office/drawing/2014/main" id="{7620125F-792C-4320-9320-8B3557AF607C}"/>
-              </a:ext>
-            </a:extLst>
-          </p:cNvPr>
-          <p:cNvSpPr>
-            <a:spLocks noGrp="1"/>
-          </p:cNvSpPr>
-          <p:nvPr/>
-        </p:nvSpPr>
-        <p:spPr>
-          <a:xfrm>
-            <a:off x="6057900" y="4248150"/>
-            <a:ext cx="5524500" cy="1371600"/>
-          </a:xfrm>
-          <a:prstGeom prst="roundRect">
-            <a:avLst>
-              <a:gd name="adj" fmla="val 5556"/>
-            </a:avLst>
-          </a:prstGeom>
-          <a:solidFill>
-            <a:srgbClr val="EEF5FC"/>
-          </a:solidFill>
-          <a:ln w="9525">
-            <a:solidFill>
-              <a:srgbClr val="D9D9D9"/>
-            </a:solidFill>
-            <a:prstDash val="solid"/>
-          </a:ln>
-        </p:spPr>
-        <p:txBody>
-          <a:bodyPr/>
-          <a:lstStyle/>
-          <a:p>
-            <a:endParaRPr lang="en-US"/>
-          </a:p>
-        </p:txBody>
-      </p:sp>
-      <p:sp>
-        <p:nvSpPr>
-          <p:cNvPr id="17" name="Rectangle 16">
-            <a:extLst>
-              <a:ext uri="{FF2B5EF4-FFF2-40B4-BE49-F238E27FC236}">
-                <a16:creationId xmlns:a16="http://schemas.microsoft.com/office/drawing/2014/main" id="{D20E9F42-173C-4979-97BD-456784DF30A2}"/>
-              </a:ext>
-            </a:extLst>
-          </p:cNvPr>
-          <p:cNvSpPr>
-            <a:spLocks noGrp="1"/>
-          </p:cNvSpPr>
-          <p:nvPr/>
-        </p:nvSpPr>
-        <p:spPr>
-          <a:xfrm>
-            <a:off x="6229350" y="4381500"/>
-            <a:ext cx="5181600" cy="228600"/>
-          </a:xfrm>
-          <a:prstGeom prst="rect">
-            <a:avLst/>
-          </a:prstGeom>
-          <a:solidFill>
-            <a:srgbClr val="000000">
-              <a:alpha val="0"/>
-            </a:srgbClr>
-          </a:solidFill>
-          <a:ln w="0">
-            <a:solidFill>
-              <a:srgbClr val="000000">
-                <a:alpha val="0"/>
-              </a:srgbClr>
-            </a:solidFill>
-            <a:prstDash val="solid"/>
-          </a:ln>
-        </p:spPr>
-        <p:txBody>
-          <a:bodyPr lIns="0" tIns="0" rIns="0" bIns="0" anchor="t"/>
-          <a:lstStyle/>
-          <a:p>
-            <a:pPr algn="l">
-              <a:defRPr sz="1050" b="1">
-                <a:solidFill>
-                  <a:srgbClr val="4472C4"/>
-                </a:solidFill>
-              </a:defRPr>
-            </a:pPr>
-            <a:r>
-              <a:rPr sz="1050" b="1">
-                <a:solidFill>
-                  <a:srgbClr val="4472C4"/>
-                </a:solidFill>
-              </a:rPr>
-              <a:t>WHY THIS IS USEFUL</a:t>
-            </a:r>
-          </a:p>
-        </p:txBody>
-      </p:sp>
-      <p:sp>
-        <p:nvSpPr>
-          <p:cNvPr id="18" name="Rectangle 17">
-            <a:extLst>
-              <a:ext uri="{FF2B5EF4-FFF2-40B4-BE49-F238E27FC236}">
-                <a16:creationId xmlns:a16="http://schemas.microsoft.com/office/drawing/2014/main" id="{3356E001-4767-442F-A408-8ACB329B9944}"/>
-              </a:ext>
-            </a:extLst>
-          </p:cNvPr>
-          <p:cNvSpPr>
-            <a:spLocks noGrp="1"/>
-          </p:cNvSpPr>
-          <p:nvPr/>
-        </p:nvSpPr>
-        <p:spPr>
-          <a:xfrm>
-            <a:off x="6229350" y="4667250"/>
-            <a:ext cx="5181600" cy="838200"/>
-          </a:xfrm>
-          <a:prstGeom prst="rect">
-            <a:avLst/>
-          </a:prstGeom>
-          <a:solidFill>
-            <a:srgbClr val="000000">
-              <a:alpha val="0"/>
-            </a:srgbClr>
-          </a:solidFill>
-          <a:ln w="0">
-            <a:solidFill>
-              <a:srgbClr val="000000">
-                <a:alpha val="0"/>
-              </a:srgbClr>
-            </a:solidFill>
-            <a:prstDash val="solid"/>
-          </a:ln>
-        </p:spPr>
-        <p:txBody>
-          <a:bodyPr lIns="0" tIns="0" rIns="0" bIns="0" anchor="t"/>
-          <a:lstStyle/>
-          <a:p>
-            <a:pPr algn="l">
-              <a:defRPr sz="1350" b="0">
-                <a:solidFill>
-                  <a:srgbClr val="44546A"/>
-                </a:solidFill>
-              </a:defRPr>
-            </a:pPr>
-            <a:r>
-              <a:rPr sz="1350" b="0">
-                <a:solidFill>
-                  <a:srgbClr val="44546A"/>
-                </a:solidFill>
-              </a:rPr>
-              <a:t>This structure is flexible: text-based models can focus on article content, collaborative methods can focus on behavior, and supervised CTR/ranking models can combine both.</a:t>
-            </a:r>
-          </a:p>
-        </p:txBody>
-      </p:sp>
-      <p:sp>
-        <p:nvSpPr>
-          <p:cNvPr id="19" name="Rectangle 18">
-            <a:extLst>
-              <a:ext uri="{FF2B5EF4-FFF2-40B4-BE49-F238E27FC236}">
-                <a16:creationId xmlns:a16="http://schemas.microsoft.com/office/drawing/2014/main" id="{4B72E9E8-0D48-4FA5-863D-146D3B513E7F}"/>
-              </a:ext>
-            </a:extLst>
-          </p:cNvPr>
-          <p:cNvSpPr>
-            <a:spLocks noGrp="1"/>
-          </p:cNvSpPr>
-          <p:nvPr/>
-        </p:nvSpPr>
-        <p:spPr>
-          <a:xfrm>
-            <a:off x="590550" y="6534150"/>
-            <a:ext cx="10668000" cy="171450"/>
-          </a:xfrm>
-          <a:prstGeom prst="rect">
-            <a:avLst/>
-          </a:prstGeom>
-          <a:solidFill>
-            <a:srgbClr val="000000">
-              <a:alpha val="0"/>
-            </a:srgbClr>
-          </a:solidFill>
-          <a:ln w="0">
-            <a:solidFill>
-              <a:srgbClr val="000000">
-                <a:alpha val="0"/>
-              </a:srgbClr>
-            </a:solidFill>
-            <a:prstDash val="solid"/>
-          </a:ln>
-        </p:spPr>
-        <p:txBody>
-          <a:bodyPr lIns="0" tIns="0" rIns="0" bIns="0" anchor="t"/>
-          <a:lstStyle/>
-          <a:p>
-            <a:pPr algn="l">
               <a:defRPr sz="750" b="0">
                 <a:solidFill>
                   <a:srgbClr val="6B7280"/>
@@ -27161,52 +26871,6 @@
                 </a:solidFill>
               </a:rPr>
               <a:t>Source: MIND official website, About section and linked dataset description reference.</a:t>
-            </a:r>
-          </a:p>
-        </p:txBody>
-      </p:sp>
-      <p:sp>
-        <p:nvSpPr>
-          <p:cNvPr id="22" name="TextBox 21">
-            <a:extLst>
-              <a:ext uri="{FF2B5EF4-FFF2-40B4-BE49-F238E27FC236}">
-                <a16:creationId xmlns:a16="http://schemas.microsoft.com/office/drawing/2014/main" id="{01F7DFE4-68F6-D2FE-B9CC-643D4EEACE8F}"/>
-              </a:ext>
-            </a:extLst>
-          </p:cNvPr>
-          <p:cNvSpPr txBox="1"/>
-          <p:nvPr/>
-        </p:nvSpPr>
-        <p:spPr>
-          <a:xfrm>
-            <a:off x="590550" y="4092349"/>
-            <a:ext cx="6096000" cy="276999"/>
-          </a:xfrm>
-          <a:prstGeom prst="rect">
-            <a:avLst/>
-          </a:prstGeom>
-          <a:noFill/>
-        </p:spPr>
-        <p:txBody>
-          <a:bodyPr wrap="square">
-            <a:spAutoFit/>
-          </a:bodyPr>
-          <a:lstStyle/>
-          <a:p>
-            <a:pPr algn="l">
-              <a:defRPr sz="1350" b="0">
-                <a:solidFill>
-                  <a:srgbClr val="44546A"/>
-                </a:solidFill>
-              </a:defRPr>
-            </a:pPr>
-            <a:r>
-              <a:rPr lang="en-US" sz="1200" b="0" dirty="0">
-                <a:solidFill>
-                  <a:srgbClr val="44546A"/>
-                </a:solidFill>
-              </a:rPr>
-              <a:t>This file supports content representation and news-side feature engineering.</a:t>
             </a:r>
           </a:p>
         </p:txBody>
@@ -27276,6 +26940,447 @@
           <a:lstStyle/>
           <a:p>
             <a:endParaRPr lang="en-US"/>
+          </a:p>
+        </p:txBody>
+      </p:sp>
+      <p:graphicFrame>
+        <p:nvGraphicFramePr>
+          <p:cNvPr id="27" name="Table 26">
+            <a:extLst>
+              <a:ext uri="{FF2B5EF4-FFF2-40B4-BE49-F238E27FC236}">
+                <a16:creationId xmlns:a16="http://schemas.microsoft.com/office/drawing/2014/main" id="{FF98E997-6686-772F-0DC4-9F0C2ACEEB7A}"/>
+              </a:ext>
+            </a:extLst>
+          </p:cNvPr>
+          <p:cNvGraphicFramePr>
+            <a:graphicFrameLocks noGrp="1"/>
+          </p:cNvGraphicFramePr>
+          <p:nvPr>
+            <p:extLst>
+              <p:ext uri="{D42A27DB-BD31-4B8C-83A1-F6EECF244321}">
+                <p14:modId xmlns:p14="http://schemas.microsoft.com/office/powerpoint/2010/main" val="2322125763"/>
+              </p:ext>
+            </p:extLst>
+          </p:nvPr>
+        </p:nvGraphicFramePr>
+        <p:xfrm>
+          <a:off x="1009650" y="4981771"/>
+          <a:ext cx="10083800" cy="1036320"/>
+        </p:xfrm>
+        <a:graphic>
+          <a:graphicData uri="http://schemas.openxmlformats.org/drawingml/2006/table">
+            <a:tbl>
+              <a:tblPr firstRow="1" bandRow="1">
+                <a:tableStyleId>{5C22544A-7EE6-4342-B048-85BDC9FD1C3A}</a:tableStyleId>
+              </a:tblPr>
+              <a:tblGrid>
+                <a:gridCol w="2016760">
+                  <a:extLst>
+                    <a:ext uri="{9D8B030D-6E8A-4147-A177-3AD203B41FA5}">
+                      <a16:colId xmlns:a16="http://schemas.microsoft.com/office/drawing/2014/main" val="2332503587"/>
+                    </a:ext>
+                  </a:extLst>
+                </a:gridCol>
+                <a:gridCol w="2016760">
+                  <a:extLst>
+                    <a:ext uri="{9D8B030D-6E8A-4147-A177-3AD203B41FA5}">
+                      <a16:colId xmlns:a16="http://schemas.microsoft.com/office/drawing/2014/main" val="2228457269"/>
+                    </a:ext>
+                  </a:extLst>
+                </a:gridCol>
+                <a:gridCol w="2016760">
+                  <a:extLst>
+                    <a:ext uri="{9D8B030D-6E8A-4147-A177-3AD203B41FA5}">
+                      <a16:colId xmlns:a16="http://schemas.microsoft.com/office/drawing/2014/main" val="3848859633"/>
+                    </a:ext>
+                  </a:extLst>
+                </a:gridCol>
+                <a:gridCol w="2016760">
+                  <a:extLst>
+                    <a:ext uri="{9D8B030D-6E8A-4147-A177-3AD203B41FA5}">
+                      <a16:colId xmlns:a16="http://schemas.microsoft.com/office/drawing/2014/main" val="1338245257"/>
+                    </a:ext>
+                  </a:extLst>
+                </a:gridCol>
+                <a:gridCol w="2016760">
+                  <a:extLst>
+                    <a:ext uri="{9D8B030D-6E8A-4147-A177-3AD203B41FA5}">
+                      <a16:colId xmlns:a16="http://schemas.microsoft.com/office/drawing/2014/main" val="2874603381"/>
+                    </a:ext>
+                  </a:extLst>
+                </a:gridCol>
+              </a:tblGrid>
+              <a:tr h="370840">
+                <a:tc>
+                  <a:txBody>
+                    <a:bodyPr/>
+                    <a:lstStyle/>
+                    <a:p>
+                      <a:r>
+                        <a:rPr lang="en-US" sz="1400" dirty="0"/>
+                        <a:t>Impression</a:t>
+                      </a:r>
+                      <a:r>
+                        <a:rPr lang="zh-CN" altLang="en-US" sz="1400" dirty="0"/>
+                        <a:t> </a:t>
+                      </a:r>
+                      <a:r>
+                        <a:rPr lang="en-US" altLang="zh-CN" sz="1400" dirty="0"/>
+                        <a:t>ID</a:t>
+                      </a:r>
+                      <a:endParaRPr lang="en-US" sz="1400" dirty="0"/>
+                    </a:p>
+                  </a:txBody>
+                  <a:tcPr/>
+                </a:tc>
+                <a:tc>
+                  <a:txBody>
+                    <a:bodyPr/>
+                    <a:lstStyle/>
+                    <a:p>
+                      <a:r>
+                        <a:rPr lang="en-US" sz="1400" dirty="0"/>
+                        <a:t>User ID</a:t>
+                      </a:r>
+                    </a:p>
+                  </a:txBody>
+                  <a:tcPr/>
+                </a:tc>
+                <a:tc>
+                  <a:txBody>
+                    <a:bodyPr/>
+                    <a:lstStyle/>
+                    <a:p>
+                      <a:r>
+                        <a:rPr lang="en-US" sz="1400" dirty="0"/>
+                        <a:t>Timestamp</a:t>
+                      </a:r>
+                    </a:p>
+                  </a:txBody>
+                  <a:tcPr/>
+                </a:tc>
+                <a:tc>
+                  <a:txBody>
+                    <a:bodyPr/>
+                    <a:lstStyle/>
+                    <a:p>
+                      <a:r>
+                        <a:rPr lang="en-US" sz="1400" dirty="0"/>
+                        <a:t>User’s clicked history</a:t>
+                      </a:r>
+                    </a:p>
+                  </a:txBody>
+                  <a:tcPr/>
+                </a:tc>
+                <a:tc>
+                  <a:txBody>
+                    <a:bodyPr/>
+                    <a:lstStyle/>
+                    <a:p>
+                      <a:r>
+                        <a:rPr lang="en-US" sz="1400" dirty="0"/>
+                        <a:t>Candidate impressions with label</a:t>
+                      </a:r>
+                    </a:p>
+                  </a:txBody>
+                  <a:tcPr/>
+                </a:tc>
+                <a:extLst>
+                  <a:ext uri="{0D108BD9-81ED-4DB2-BD59-A6C34878D82A}">
+                    <a16:rowId xmlns:a16="http://schemas.microsoft.com/office/drawing/2014/main" val="3063430806"/>
+                  </a:ext>
+                </a:extLst>
+              </a:tr>
+              <a:tr h="370840">
+                <a:tc>
+                  <a:txBody>
+                    <a:bodyPr/>
+                    <a:lstStyle/>
+                    <a:p>
+                      <a:r>
+                        <a:rPr lang="en-US" sz="1400" dirty="0"/>
+                        <a:t>1</a:t>
+                      </a:r>
+                    </a:p>
+                  </a:txBody>
+                  <a:tcPr/>
+                </a:tc>
+                <a:tc>
+                  <a:txBody>
+                    <a:bodyPr/>
+                    <a:lstStyle/>
+                    <a:p>
+                      <a:r>
+                        <a:rPr lang="en-US" sz="1400" dirty="0"/>
+                        <a:t>U13740</a:t>
+                      </a:r>
+                    </a:p>
+                  </a:txBody>
+                  <a:tcPr/>
+                </a:tc>
+                <a:tc>
+                  <a:txBody>
+                    <a:bodyPr/>
+                    <a:lstStyle/>
+                    <a:p>
+                      <a:r>
+                        <a:rPr lang="en-US" sz="1400" dirty="0"/>
+                        <a:t>11/11/2019 9:05</a:t>
+                      </a:r>
+                    </a:p>
+                  </a:txBody>
+                  <a:tcPr/>
+                </a:tc>
+                <a:tc>
+                  <a:txBody>
+                    <a:bodyPr/>
+                    <a:lstStyle/>
+                    <a:p>
+                      <a:r>
+                        <a:rPr lang="en-US" sz="1400" dirty="0"/>
+                        <a:t>N55189 N42782 …</a:t>
+                      </a:r>
+                    </a:p>
+                  </a:txBody>
+                  <a:tcPr/>
+                </a:tc>
+                <a:tc>
+                  <a:txBody>
+                    <a:bodyPr/>
+                    <a:lstStyle/>
+                    <a:p>
+                      <a:r>
+                        <a:rPr lang="en-US" sz="1400" dirty="0"/>
+                        <a:t>N55689-1 (C</a:t>
+                      </a:r>
+                      <a:r>
+                        <a:rPr lang="en-US" altLang="zh-CN" sz="1400" dirty="0"/>
+                        <a:t>lick</a:t>
+                      </a:r>
+                      <a:r>
+                        <a:rPr lang="en-US" sz="1400" dirty="0"/>
+                        <a:t>)</a:t>
+                      </a:r>
+                    </a:p>
+                    <a:p>
+                      <a:r>
+                        <a:rPr lang="en-US" sz="1400" dirty="0"/>
+                        <a:t>N35729-</a:t>
+                      </a:r>
+                      <a:r>
+                        <a:rPr lang="en-US" altLang="zh-CN" sz="1400" dirty="0"/>
+                        <a:t>0(Non-click)…</a:t>
+                      </a:r>
+                      <a:endParaRPr lang="en-US" sz="1400" dirty="0"/>
+                    </a:p>
+                  </a:txBody>
+                  <a:tcPr/>
+                </a:tc>
+                <a:extLst>
+                  <a:ext uri="{0D108BD9-81ED-4DB2-BD59-A6C34878D82A}">
+                    <a16:rowId xmlns:a16="http://schemas.microsoft.com/office/drawing/2014/main" val="3181156031"/>
+                  </a:ext>
+                </a:extLst>
+              </a:tr>
+            </a:tbl>
+          </a:graphicData>
+        </a:graphic>
+      </p:graphicFrame>
+      <p:sp>
+        <p:nvSpPr>
+          <p:cNvPr id="28" name="Rectangle 27">
+            <a:extLst>
+              <a:ext uri="{FF2B5EF4-FFF2-40B4-BE49-F238E27FC236}">
+                <a16:creationId xmlns:a16="http://schemas.microsoft.com/office/drawing/2014/main" id="{19F1AA48-71DE-14EF-9165-3492CBAA53BF}"/>
+              </a:ext>
+            </a:extLst>
+          </p:cNvPr>
+          <p:cNvSpPr>
+            <a:spLocks noGrp="1"/>
+          </p:cNvSpPr>
+          <p:nvPr/>
+        </p:nvSpPr>
+        <p:spPr>
+          <a:xfrm>
+            <a:off x="1009650" y="4615908"/>
+            <a:ext cx="8953500" cy="419100"/>
+          </a:xfrm>
+          <a:prstGeom prst="rect">
+            <a:avLst/>
+          </a:prstGeom>
+          <a:solidFill>
+            <a:srgbClr val="000000">
+              <a:alpha val="0"/>
+            </a:srgbClr>
+          </a:solidFill>
+          <a:ln w="0">
+            <a:solidFill>
+              <a:srgbClr val="000000">
+                <a:alpha val="0"/>
+              </a:srgbClr>
+            </a:solidFill>
+            <a:prstDash val="solid"/>
+          </a:ln>
+        </p:spPr>
+        <p:txBody>
+          <a:bodyPr lIns="0" tIns="0" rIns="0" bIns="0" anchor="t"/>
+          <a:lstStyle/>
+          <a:p>
+            <a:pPr algn="l">
+              <a:defRPr sz="1275" b="0">
+                <a:solidFill>
+                  <a:srgbClr val="44546A"/>
+                </a:solidFill>
+              </a:defRPr>
+            </a:pPr>
+            <a:r>
+              <a:rPr lang="en-US" sz="1275" b="0" dirty="0">
+                <a:solidFill>
+                  <a:srgbClr val="44546A"/>
+                </a:solidFill>
+              </a:rPr>
+              <a:t>Example for one impression</a:t>
+            </a:r>
+            <a:endParaRPr sz="1275" b="0" dirty="0">
+              <a:solidFill>
+                <a:srgbClr val="44546A"/>
+              </a:solidFill>
+            </a:endParaRPr>
+          </a:p>
+        </p:txBody>
+      </p:sp>
+      <p:sp>
+        <p:nvSpPr>
+          <p:cNvPr id="31" name="Bent-Up Arrow 30">
+            <a:extLst>
+              <a:ext uri="{FF2B5EF4-FFF2-40B4-BE49-F238E27FC236}">
+                <a16:creationId xmlns:a16="http://schemas.microsoft.com/office/drawing/2014/main" id="{25702E44-3141-6C0D-A16A-2261F3DF4E98}"/>
+              </a:ext>
+            </a:extLst>
+          </p:cNvPr>
+          <p:cNvSpPr/>
+          <p:nvPr/>
+        </p:nvSpPr>
+        <p:spPr>
+          <a:xfrm rot="10800000" flipH="1">
+            <a:off x="8382000" y="4356537"/>
+            <a:ext cx="1785257" cy="539852"/>
+          </a:xfrm>
+          <a:prstGeom prst="bentUpArrow">
+            <a:avLst/>
+          </a:prstGeom>
+        </p:spPr>
+        <p:style>
+          <a:lnRef idx="2">
+            <a:schemeClr val="accent1">
+              <a:shade val="15000"/>
+            </a:schemeClr>
+          </a:lnRef>
+          <a:fillRef idx="1">
+            <a:schemeClr val="accent1"/>
+          </a:fillRef>
+          <a:effectRef idx="0">
+            <a:schemeClr val="accent1"/>
+          </a:effectRef>
+          <a:fontRef idx="minor">
+            <a:schemeClr val="lt1"/>
+          </a:fontRef>
+        </p:style>
+        <p:txBody>
+          <a:bodyPr rtlCol="0" anchor="ctr"/>
+          <a:lstStyle/>
+          <a:p>
+            <a:pPr algn="ctr"/>
+            <a:endParaRPr lang="en-US"/>
+          </a:p>
+        </p:txBody>
+      </p:sp>
+      <p:sp>
+        <p:nvSpPr>
+          <p:cNvPr id="32" name="Rectangle 31">
+            <a:extLst>
+              <a:ext uri="{FF2B5EF4-FFF2-40B4-BE49-F238E27FC236}">
+                <a16:creationId xmlns:a16="http://schemas.microsoft.com/office/drawing/2014/main" id="{34FAF31C-9F2E-82F6-6A0C-4C8F74905BD8}"/>
+              </a:ext>
+            </a:extLst>
+          </p:cNvPr>
+          <p:cNvSpPr>
+            <a:spLocks noGrp="1"/>
+          </p:cNvSpPr>
+          <p:nvPr/>
+        </p:nvSpPr>
+        <p:spPr>
+          <a:xfrm>
+            <a:off x="3714181" y="4315000"/>
+            <a:ext cx="8953500" cy="419100"/>
+          </a:xfrm>
+          <a:prstGeom prst="rect">
+            <a:avLst/>
+          </a:prstGeom>
+          <a:solidFill>
+            <a:srgbClr val="000000">
+              <a:alpha val="0"/>
+            </a:srgbClr>
+          </a:solidFill>
+          <a:ln w="0">
+            <a:solidFill>
+              <a:srgbClr val="000000">
+                <a:alpha val="0"/>
+              </a:srgbClr>
+            </a:solidFill>
+            <a:prstDash val="solid"/>
+          </a:ln>
+        </p:spPr>
+        <p:txBody>
+          <a:bodyPr lIns="0" tIns="0" rIns="0" bIns="0" anchor="t"/>
+          <a:lstStyle/>
+          <a:p>
+            <a:pPr>
+              <a:defRPr sz="1275" b="0">
+                <a:solidFill>
+                  <a:srgbClr val="44546A"/>
+                </a:solidFill>
+              </a:defRPr>
+            </a:pPr>
+            <a:r>
+              <a:rPr lang="en-US" sz="1275" b="1" dirty="0">
+                <a:solidFill>
+                  <a:srgbClr val="44546A"/>
+                </a:solidFill>
+              </a:rPr>
+              <a:t>The orders of news in an impression have been shuffled.  </a:t>
+            </a:r>
+          </a:p>
+          <a:p>
+            <a:pPr>
+              <a:defRPr sz="1275" b="0">
+                <a:solidFill>
+                  <a:srgbClr val="44546A"/>
+                </a:solidFill>
+              </a:defRPr>
+            </a:pPr>
+            <a:r>
+              <a:rPr lang="en-US" sz="1275" b="1" dirty="0"/>
+              <a:t>The position of a candidate should not be used as a training feature.</a:t>
+            </a:r>
+            <a:r>
+              <a:rPr lang="en-US" sz="1275" dirty="0"/>
+              <a:t> </a:t>
+            </a:r>
+          </a:p>
+          <a:p>
+            <a:pPr>
+              <a:defRPr sz="1275" b="0">
+                <a:solidFill>
+                  <a:srgbClr val="44546A"/>
+                </a:solidFill>
+              </a:defRPr>
+            </a:pPr>
+            <a:endParaRPr lang="en-US" sz="1275" dirty="0">
+              <a:solidFill>
+                <a:srgbClr val="44546A"/>
+              </a:solidFill>
+            </a:endParaRPr>
           </a:p>
         </p:txBody>
       </p:sp>

--- a/round1_baselines/Presentation1.pptx
+++ b/round1_baselines/Presentation1.pptx
@@ -5,7 +5,7 @@
     <p:sldMasterId id="2147483648" r:id="rId1"/>
   </p:sldMasterIdLst>
   <p:notesMasterIdLst>
-    <p:notesMasterId r:id="rId19"/>
+    <p:notesMasterId r:id="rId18"/>
   </p:notesMasterIdLst>
   <p:sldIdLst>
     <p:sldId id="276" r:id="rId2"/>
@@ -24,7 +24,6 @@
     <p:sldId id="265" r:id="rId15"/>
     <p:sldId id="266" r:id="rId16"/>
     <p:sldId id="267" r:id="rId17"/>
-    <p:sldId id="281" r:id="rId18"/>
   </p:sldIdLst>
   <p:sldSz cx="12192000" cy="6858000"/>
   <p:notesSz cx="6858000" cy="9144000"/>
@@ -820,110 +819,6 @@
         </p:txBody>
       </p:sp>
     </p:spTree>
-  </p:cSld>
-  <p:clrMapOvr>
-    <a:masterClrMapping/>
-  </p:clrMapOvr>
-</p:notes>
-</file>
-
-<file path=ppt/notesSlides/notesSlide16.xml><?xml version="1.0" encoding="utf-8"?>
-<p:notes xmlns:a="http://schemas.openxmlformats.org/drawingml/2006/main" xmlns:r="http://schemas.openxmlformats.org/officeDocument/2006/relationships" xmlns:p="http://schemas.openxmlformats.org/presentationml/2006/main">
-  <p:cSld>
-    <p:spTree>
-      <p:nvGrpSpPr>
-        <p:cNvPr id="1" name="">
-          <a:extLst>
-            <a:ext uri="{FF2B5EF4-FFF2-40B4-BE49-F238E27FC236}">
-              <a16:creationId xmlns:a16="http://schemas.microsoft.com/office/drawing/2014/main" id="{2639F318-063B-DE99-F0FA-8A820B878492}"/>
-            </a:ext>
-          </a:extLst>
-        </p:cNvPr>
-        <p:cNvGrpSpPr/>
-        <p:nvPr/>
-      </p:nvGrpSpPr>
-      <p:grpSpPr>
-        <a:xfrm>
-          <a:off x="0" y="0"/>
-          <a:ext cx="0" cy="0"/>
-          <a:chOff x="0" y="0"/>
-          <a:chExt cx="0" cy="0"/>
-        </a:xfrm>
-      </p:grpSpPr>
-      <p:sp>
-        <p:nvSpPr>
-          <p:cNvPr id="2" name="Slide Image Placeholder 1">
-            <a:extLst>
-              <a:ext uri="{FF2B5EF4-FFF2-40B4-BE49-F238E27FC236}">
-                <a16:creationId xmlns:a16="http://schemas.microsoft.com/office/drawing/2014/main" id="{4F833058-8FF4-6B6F-646F-313A042B00E9}"/>
-              </a:ext>
-            </a:extLst>
-          </p:cNvPr>
-          <p:cNvSpPr>
-            <a:spLocks noGrp="1" noRot="1" noChangeAspect="1"/>
-          </p:cNvSpPr>
-          <p:nvPr>
-            <p:ph type="sldImg"/>
-          </p:nvPr>
-        </p:nvSpPr>
-        <p:spPr/>
-      </p:sp>
-      <p:sp>
-        <p:nvSpPr>
-          <p:cNvPr id="3" name="Notes Placeholder 2">
-            <a:extLst>
-              <a:ext uri="{FF2B5EF4-FFF2-40B4-BE49-F238E27FC236}">
-                <a16:creationId xmlns:a16="http://schemas.microsoft.com/office/drawing/2014/main" id="{477FF66A-8AE9-BC1A-2EFF-E160FC9BF8C4}"/>
-              </a:ext>
-            </a:extLst>
-          </p:cNvPr>
-          <p:cNvSpPr>
-            <a:spLocks noGrp="1"/>
-          </p:cNvSpPr>
-          <p:nvPr>
-            <p:ph type="body" idx="1"/>
-          </p:nvPr>
-        </p:nvSpPr>
-        <p:spPr/>
-        <p:txBody>
-          <a:bodyPr/>
-          <a:lstStyle/>
-          <a:p>
-            <a:endParaRPr/>
-          </a:p>
-        </p:txBody>
-      </p:sp>
-      <p:sp>
-        <p:nvSpPr>
-          <p:cNvPr id="4" name="Slide Number Placeholder 3">
-            <a:extLst>
-              <a:ext uri="{FF2B5EF4-FFF2-40B4-BE49-F238E27FC236}">
-                <a16:creationId xmlns:a16="http://schemas.microsoft.com/office/drawing/2014/main" id="{D9A33EDB-F82E-C07D-A0EA-95689D757097}"/>
-              </a:ext>
-            </a:extLst>
-          </p:cNvPr>
-          <p:cNvSpPr>
-            <a:spLocks noGrp="1"/>
-          </p:cNvSpPr>
-          <p:nvPr>
-            <p:ph type="sldNum" idx="5"/>
-          </p:nvPr>
-        </p:nvSpPr>
-        <p:spPr/>
-        <p:txBody>
-          <a:bodyPr/>
-          <a:lstStyle/>
-          <a:p>
-            <a:endParaRPr/>
-          </a:p>
-        </p:txBody>
-      </p:sp>
-    </p:spTree>
-    <p:extLst>
-      <p:ext uri="{BB962C8B-B14F-4D97-AF65-F5344CB8AC3E}">
-        <p14:creationId xmlns:p14="http://schemas.microsoft.com/office/powerpoint/2010/main" val="3936851585"/>
-      </p:ext>
-    </p:extLst>
   </p:cSld>
   <p:clrMapOvr>
     <a:masterClrMapping/>
@@ -21354,355 +21249,6 @@
 </p:sld>
 </file>
 
-<file path=ppt/slides/slide17.xml><?xml version="1.0" encoding="utf-8"?>
-<p:sld xmlns:a="http://schemas.openxmlformats.org/drawingml/2006/main" xmlns:r="http://schemas.openxmlformats.org/officeDocument/2006/relationships" xmlns:p="http://schemas.openxmlformats.org/presentationml/2006/main">
-  <p:cSld>
-    <p:spTree>
-      <p:nvGrpSpPr>
-        <p:cNvPr id="1" name="">
-          <a:extLst>
-            <a:ext uri="{FF2B5EF4-FFF2-40B4-BE49-F238E27FC236}">
-              <a16:creationId xmlns:a16="http://schemas.microsoft.com/office/drawing/2014/main" id="{D0D9DE22-C4E2-85AB-C8AB-4DF83562AFFF}"/>
-            </a:ext>
-          </a:extLst>
-        </p:cNvPr>
-        <p:cNvGrpSpPr/>
-        <p:nvPr/>
-      </p:nvGrpSpPr>
-      <p:grpSpPr>
-        <a:xfrm>
-          <a:off x="0" y="0"/>
-          <a:ext cx="0" cy="0"/>
-          <a:chOff x="0" y="0"/>
-          <a:chExt cx="0" cy="0"/>
-        </a:xfrm>
-      </p:grpSpPr>
-      <p:sp>
-        <p:nvSpPr>
-          <p:cNvPr id="4" name="Rectangle 3">
-            <a:extLst>
-              <a:ext uri="{FF2B5EF4-FFF2-40B4-BE49-F238E27FC236}">
-                <a16:creationId xmlns:a16="http://schemas.microsoft.com/office/drawing/2014/main" id="{A8809924-8D21-2922-B02C-F01D8F9F395A}"/>
-              </a:ext>
-            </a:extLst>
-          </p:cNvPr>
-          <p:cNvSpPr>
-            <a:spLocks noGrp="1"/>
-          </p:cNvSpPr>
-          <p:nvPr/>
-        </p:nvSpPr>
-        <p:spPr>
-          <a:xfrm>
-            <a:off x="11087100" y="133350"/>
-            <a:ext cx="495300" cy="266700"/>
-          </a:xfrm>
-          <a:prstGeom prst="rect">
-            <a:avLst/>
-          </a:prstGeom>
-          <a:solidFill>
-            <a:srgbClr val="000000">
-              <a:alpha val="0"/>
-            </a:srgbClr>
-          </a:solidFill>
-          <a:ln w="0">
-            <a:solidFill>
-              <a:srgbClr val="000000">
-                <a:alpha val="0"/>
-              </a:srgbClr>
-            </a:solidFill>
-            <a:prstDash val="solid"/>
-          </a:ln>
-        </p:spPr>
-        <p:txBody>
-          <a:bodyPr lIns="0" tIns="0" rIns="0" bIns="0" anchor="t"/>
-          <a:lstStyle/>
-          <a:p>
-            <a:pPr algn="r">
-              <a:defRPr sz="1350" b="1">
-                <a:solidFill>
-                  <a:srgbClr val="4472C4"/>
-                </a:solidFill>
-              </a:defRPr>
-            </a:pPr>
-            <a:r>
-              <a:rPr sz="1350" b="1" dirty="0">
-                <a:solidFill>
-                  <a:srgbClr val="4472C4"/>
-                </a:solidFill>
-              </a:rPr>
-              <a:t>1</a:t>
-            </a:r>
-            <a:r>
-              <a:rPr lang="en-US" altLang="zh-CN" sz="1350" b="1" dirty="0">
-                <a:solidFill>
-                  <a:srgbClr val="4472C4"/>
-                </a:solidFill>
-              </a:rPr>
-              <a:t>6</a:t>
-            </a:r>
-            <a:endParaRPr sz="1350" b="1" dirty="0">
-              <a:solidFill>
-                <a:srgbClr val="4472C4"/>
-              </a:solidFill>
-            </a:endParaRPr>
-          </a:p>
-        </p:txBody>
-      </p:sp>
-      <p:sp>
-        <p:nvSpPr>
-          <p:cNvPr id="5" name="Rectangle 4">
-            <a:extLst>
-              <a:ext uri="{FF2B5EF4-FFF2-40B4-BE49-F238E27FC236}">
-                <a16:creationId xmlns:a16="http://schemas.microsoft.com/office/drawing/2014/main" id="{A8CE6C35-FF07-BF1F-7EBC-4A359F1ABD33}"/>
-              </a:ext>
-            </a:extLst>
-          </p:cNvPr>
-          <p:cNvSpPr>
-            <a:spLocks noGrp="1"/>
-          </p:cNvSpPr>
-          <p:nvPr/>
-        </p:nvSpPr>
-        <p:spPr>
-          <a:xfrm>
-            <a:off x="590550" y="720960"/>
-            <a:ext cx="7239000" cy="571500"/>
-          </a:xfrm>
-          <a:prstGeom prst="rect">
-            <a:avLst/>
-          </a:prstGeom>
-          <a:solidFill>
-            <a:srgbClr val="000000">
-              <a:alpha val="0"/>
-            </a:srgbClr>
-          </a:solidFill>
-          <a:ln w="0">
-            <a:solidFill>
-              <a:srgbClr val="000000">
-                <a:alpha val="0"/>
-              </a:srgbClr>
-            </a:solidFill>
-            <a:prstDash val="solid"/>
-          </a:ln>
-        </p:spPr>
-        <p:txBody>
-          <a:bodyPr lIns="0" tIns="0" rIns="0" bIns="0" anchor="t"/>
-          <a:lstStyle/>
-          <a:p>
-            <a:pPr algn="l">
-              <a:defRPr sz="2400" b="1">
-                <a:solidFill>
-                  <a:srgbClr val="000000"/>
-                </a:solidFill>
-              </a:defRPr>
-            </a:pPr>
-            <a:r>
-              <a:rPr lang="en-US" sz="2400" b="1" dirty="0">
-                <a:solidFill>
-                  <a:srgbClr val="000000"/>
-                </a:solidFill>
-              </a:rPr>
-              <a:t>Q</a:t>
-            </a:r>
-            <a:r>
-              <a:rPr lang="en-US" altLang="zh-CN" sz="2400" b="1" dirty="0">
-                <a:solidFill>
-                  <a:srgbClr val="000000"/>
-                </a:solidFill>
-              </a:rPr>
-              <a:t>&amp;A</a:t>
-            </a:r>
-            <a:endParaRPr sz="2400" b="1" dirty="0">
-              <a:solidFill>
-                <a:srgbClr val="000000"/>
-              </a:solidFill>
-            </a:endParaRPr>
-          </a:p>
-        </p:txBody>
-      </p:sp>
-      <p:sp>
-        <p:nvSpPr>
-          <p:cNvPr id="6" name="Rectangle 5">
-            <a:extLst>
-              <a:ext uri="{FF2B5EF4-FFF2-40B4-BE49-F238E27FC236}">
-                <a16:creationId xmlns:a16="http://schemas.microsoft.com/office/drawing/2014/main" id="{1F14ADE1-20F8-AB81-9D0B-C0153A5585BB}"/>
-              </a:ext>
-            </a:extLst>
-          </p:cNvPr>
-          <p:cNvSpPr>
-            <a:spLocks noGrp="1"/>
-          </p:cNvSpPr>
-          <p:nvPr/>
-        </p:nvSpPr>
-        <p:spPr>
-          <a:xfrm>
-            <a:off x="590550" y="2121921"/>
-            <a:ext cx="10496550" cy="419100"/>
-          </a:xfrm>
-          <a:prstGeom prst="rect">
-            <a:avLst/>
-          </a:prstGeom>
-          <a:solidFill>
-            <a:srgbClr val="000000">
-              <a:alpha val="0"/>
-            </a:srgbClr>
-          </a:solidFill>
-          <a:ln w="0">
-            <a:solidFill>
-              <a:srgbClr val="000000">
-                <a:alpha val="0"/>
-              </a:srgbClr>
-            </a:solidFill>
-            <a:prstDash val="solid"/>
-          </a:ln>
-        </p:spPr>
-        <p:txBody>
-          <a:bodyPr lIns="0" tIns="0" rIns="0" bIns="0" anchor="t"/>
-          <a:lstStyle/>
-          <a:p>
-            <a:r>
-              <a:rPr lang="en-US" altLang="zh-CN" b="1" dirty="0"/>
-              <a:t>1.</a:t>
-            </a:r>
-            <a:r>
-              <a:rPr lang="zh-CN" altLang="en-US" b="1" dirty="0"/>
-              <a:t> </a:t>
-            </a:r>
-            <a:r>
-              <a:rPr lang="en-US" b="1" dirty="0"/>
-              <a:t>We’re planning to use a more advanced model next. Does this direction make sense, or would you suggest a different priority?</a:t>
-            </a:r>
-            <a:endParaRPr lang="en-US" dirty="0"/>
-          </a:p>
-        </p:txBody>
-      </p:sp>
-      <p:sp>
-        <p:nvSpPr>
-          <p:cNvPr id="75" name="Rectangle 74">
-            <a:extLst>
-              <a:ext uri="{FF2B5EF4-FFF2-40B4-BE49-F238E27FC236}">
-                <a16:creationId xmlns:a16="http://schemas.microsoft.com/office/drawing/2014/main" id="{516CC6DC-9445-65A1-1590-AF058511D635}"/>
-              </a:ext>
-            </a:extLst>
-          </p:cNvPr>
-          <p:cNvSpPr>
-            <a:spLocks noGrp="1"/>
-          </p:cNvSpPr>
-          <p:nvPr/>
-        </p:nvSpPr>
-        <p:spPr>
-          <a:xfrm>
-            <a:off x="457200" y="647700"/>
-            <a:ext cx="11277600" cy="19050"/>
-          </a:xfrm>
-          <a:prstGeom prst="rect">
-            <a:avLst/>
-          </a:prstGeom>
-          <a:solidFill>
-            <a:srgbClr val="000000"/>
-          </a:solidFill>
-          <a:ln w="0">
-            <a:solidFill>
-              <a:srgbClr val="000000"/>
-            </a:solidFill>
-            <a:prstDash val="solid"/>
-          </a:ln>
-        </p:spPr>
-        <p:txBody>
-          <a:bodyPr/>
-          <a:lstStyle/>
-          <a:p>
-            <a:endParaRPr lang="en-US"/>
-          </a:p>
-        </p:txBody>
-      </p:sp>
-      <p:pic>
-        <p:nvPicPr>
-          <p:cNvPr id="76" name="Picture 75">
-            <a:extLst>
-              <a:ext uri="{FF2B5EF4-FFF2-40B4-BE49-F238E27FC236}">
-                <a16:creationId xmlns:a16="http://schemas.microsoft.com/office/drawing/2014/main" id="{9EAEF2C7-6E06-459E-EEE2-85A981C6500F}"/>
-              </a:ext>
-            </a:extLst>
-          </p:cNvPr>
-          <p:cNvPicPr>
-            <a:picLocks noChangeAspect="1"/>
-          </p:cNvPicPr>
-          <p:nvPr/>
-        </p:nvPicPr>
-        <p:blipFill>
-          <a:blip r:embed="rId3"/>
-          <a:stretch/>
-        </p:blipFill>
-        <p:spPr>
-          <a:xfrm>
-            <a:off x="290817" y="-134540"/>
-            <a:ext cx="2956648" cy="914400"/>
-          </a:xfrm>
-          <a:prstGeom prst="rect">
-            <a:avLst/>
-          </a:prstGeom>
-        </p:spPr>
-      </p:pic>
-      <p:sp>
-        <p:nvSpPr>
-          <p:cNvPr id="3" name="TextBox 2">
-            <a:extLst>
-              <a:ext uri="{FF2B5EF4-FFF2-40B4-BE49-F238E27FC236}">
-                <a16:creationId xmlns:a16="http://schemas.microsoft.com/office/drawing/2014/main" id="{9CF0DC69-9D17-9723-2694-02D415C6F92D}"/>
-              </a:ext>
-            </a:extLst>
-          </p:cNvPr>
-          <p:cNvSpPr txBox="1"/>
-          <p:nvPr/>
-        </p:nvSpPr>
-        <p:spPr>
-          <a:xfrm>
-            <a:off x="523874" y="3789582"/>
-            <a:ext cx="10496549" cy="923330"/>
-          </a:xfrm>
-          <a:prstGeom prst="rect">
-            <a:avLst/>
-          </a:prstGeom>
-          <a:noFill/>
-        </p:spPr>
-        <p:txBody>
-          <a:bodyPr wrap="square">
-            <a:spAutoFit/>
-          </a:bodyPr>
-          <a:lstStyle/>
-          <a:p>
-            <a:pPr>
-              <a:buNone/>
-            </a:pPr>
-            <a:r>
-              <a:rPr lang="en-US" altLang="zh-CN" b="1" dirty="0"/>
-              <a:t>2.</a:t>
-            </a:r>
-            <a:r>
-              <a:rPr lang="zh-CN" altLang="en-US" b="1" dirty="0"/>
-              <a:t> </a:t>
-            </a:r>
-            <a:r>
-              <a:rPr lang="en-US" b="1" dirty="0"/>
-              <a:t>For cold-start scenarios, particularly when user interaction data is limited, which approach would you recommend prioritizing? We are planning to build a dashboard or application to demonstrate our model’s real-world behavior, and we expect to encounter this issue in practice.</a:t>
-            </a:r>
-            <a:endParaRPr lang="en-US" dirty="0"/>
-          </a:p>
-        </p:txBody>
-      </p:sp>
-    </p:spTree>
-    <p:extLst>
-      <p:ext uri="{BB962C8B-B14F-4D97-AF65-F5344CB8AC3E}">
-        <p14:creationId xmlns:p14="http://schemas.microsoft.com/office/powerpoint/2010/main" val="645905005"/>
-      </p:ext>
-    </p:extLst>
-  </p:cSld>
-  <p:clrMapOvr>
-    <a:masterClrMapping/>
-  </p:clrMapOvr>
-</p:sld>
-</file>
-
 <file path=ppt/slides/slide2.xml><?xml version="1.0" encoding="utf-8"?>
 <p:sld xmlns:a="http://schemas.openxmlformats.org/drawingml/2006/main" xmlns:r="http://schemas.openxmlformats.org/officeDocument/2006/relationships" xmlns:p="http://schemas.openxmlformats.org/presentationml/2006/main">
   <p:cSld>
